--- a/Presentations/SurrogateModel.pptx
+++ b/Presentations/SurrogateModel.pptx
@@ -5,7 +5,7 @@
     <p:sldMasterId id="2147483648" r:id="rId1"/>
   </p:sldMasterIdLst>
   <p:notesMasterIdLst>
-    <p:notesMasterId r:id="rId8"/>
+    <p:notesMasterId r:id="rId12"/>
   </p:notesMasterIdLst>
   <p:sldIdLst>
     <p:sldId id="256" r:id="rId2"/>
@@ -13,7 +13,11 @@
     <p:sldId id="272" r:id="rId4"/>
     <p:sldId id="278" r:id="rId5"/>
     <p:sldId id="279" r:id="rId6"/>
-    <p:sldId id="269" r:id="rId7"/>
+    <p:sldId id="280" r:id="rId7"/>
+    <p:sldId id="281" r:id="rId8"/>
+    <p:sldId id="282" r:id="rId9"/>
+    <p:sldId id="283" r:id="rId10"/>
+    <p:sldId id="269" r:id="rId11"/>
   </p:sldIdLst>
   <p:sldSz cx="9144000" cy="6858000" type="screen4x3"/>
   <p:notesSz cx="6858000" cy="9144000"/>
@@ -3482,6 +3486,75 @@
 </p:sld>
 </file>
 
+<file path=ppt/slides/slide10.xml><?xml version="1.0" encoding="utf-8"?>
+<p:sld xmlns:a="http://schemas.openxmlformats.org/drawingml/2006/main" xmlns:r="http://schemas.openxmlformats.org/officeDocument/2006/relationships" xmlns:p="http://schemas.openxmlformats.org/presentationml/2006/main">
+  <p:cSld>
+    <p:spTree>
+      <p:nvGrpSpPr>
+        <p:cNvPr id="1" name=""/>
+        <p:cNvGrpSpPr/>
+        <p:nvPr/>
+      </p:nvGrpSpPr>
+      <p:grpSpPr>
+        <a:xfrm>
+          <a:off x="0" y="0"/>
+          <a:ext cx="0" cy="0"/>
+          <a:chOff x="0" y="0"/>
+          <a:chExt cx="0" cy="0"/>
+        </a:xfrm>
+      </p:grpSpPr>
+      <p:sp>
+        <p:nvSpPr>
+          <p:cNvPr id="2" name="Title 1"/>
+          <p:cNvSpPr>
+            <a:spLocks noGrp="1"/>
+          </p:cNvSpPr>
+          <p:nvPr>
+            <p:ph type="ctrTitle"/>
+          </p:nvPr>
+        </p:nvSpPr>
+        <p:spPr/>
+        <p:txBody>
+          <a:bodyPr/>
+          <a:lstStyle/>
+          <a:p>
+            <a:r>
+              <a:rPr lang="en-US" dirty="0"/>
+              <a:t>Questions?</a:t>
+            </a:r>
+          </a:p>
+        </p:txBody>
+      </p:sp>
+      <p:sp>
+        <p:nvSpPr>
+          <p:cNvPr id="3" name="Subtitle 2"/>
+          <p:cNvSpPr>
+            <a:spLocks noGrp="1"/>
+          </p:cNvSpPr>
+          <p:nvPr>
+            <p:ph type="subTitle" idx="1"/>
+          </p:nvPr>
+        </p:nvSpPr>
+        <p:spPr/>
+        <p:txBody>
+          <a:bodyPr/>
+          <a:lstStyle/>
+          <a:p>
+            <a:r>
+              <a:rPr lang="en-US" dirty="0"/>
+              <a:t>Thank you</a:t>
+            </a:r>
+          </a:p>
+        </p:txBody>
+      </p:sp>
+    </p:spTree>
+  </p:cSld>
+  <p:clrMapOvr>
+    <a:masterClrMapping/>
+  </p:clrMapOvr>
+</p:sld>
+</file>
+
 <file path=ppt/slides/slide2.xml><?xml version="1.0" encoding="utf-8"?>
 <p:sld xmlns:a="http://schemas.openxmlformats.org/drawingml/2006/main" xmlns:r="http://schemas.openxmlformats.org/officeDocument/2006/relationships" xmlns:p="http://schemas.openxmlformats.org/presentationml/2006/main">
   <p:cSld>
@@ -3997,44 +4070,518 @@
             <a:spLocks noGrp="1"/>
           </p:cNvSpPr>
           <p:nvPr>
-            <p:ph type="ctrTitle"/>
-          </p:nvPr>
-        </p:nvSpPr>
-        <p:spPr/>
-        <p:txBody>
-          <a:bodyPr/>
-          <a:lstStyle/>
-          <a:p>
-            <a:r>
-              <a:rPr lang="en-US" dirty="0"/>
-              <a:t>Questions?</a:t>
-            </a:r>
-          </a:p>
-        </p:txBody>
-      </p:sp>
-      <p:sp>
-        <p:nvSpPr>
-          <p:cNvPr id="3" name="Subtitle 2"/>
-          <p:cNvSpPr>
-            <a:spLocks noGrp="1"/>
-          </p:cNvSpPr>
-          <p:nvPr>
-            <p:ph type="subTitle" idx="1"/>
-          </p:nvPr>
-        </p:nvSpPr>
-        <p:spPr/>
-        <p:txBody>
-          <a:bodyPr/>
-          <a:lstStyle/>
-          <a:p>
-            <a:r>
-              <a:rPr lang="en-US" dirty="0"/>
-              <a:t>Thank you</a:t>
-            </a:r>
+            <p:ph type="title"/>
+          </p:nvPr>
+        </p:nvSpPr>
+        <p:spPr/>
+        <p:txBody>
+          <a:bodyPr>
+            <a:normAutofit/>
+          </a:bodyPr>
+          <a:lstStyle/>
+          <a:p>
+            <a:r>
+              <a:rPr lang="en-US" dirty="0"/>
+              <a:t>Surrogate Model – Key Idea</a:t>
+            </a:r>
+          </a:p>
+        </p:txBody>
+      </p:sp>
+      <p:sp>
+        <p:nvSpPr>
+          <p:cNvPr id="4" name="Content Placeholder 3"/>
+          <p:cNvSpPr>
+            <a:spLocks noGrp="1"/>
+          </p:cNvSpPr>
+          <p:nvPr>
+            <p:ph idx="1"/>
+          </p:nvPr>
+        </p:nvSpPr>
+        <p:spPr/>
+        <p:txBody>
+          <a:bodyPr>
+            <a:normAutofit lnSpcReduction="10000"/>
+          </a:bodyPr>
+          <a:lstStyle/>
+          <a:p>
+            <a:r>
+              <a:rPr lang="en-US" dirty="0"/>
+              <a:t>Run a few simulations</a:t>
+            </a:r>
+          </a:p>
+          <a:p>
+            <a:r>
+              <a:rPr lang="en-US" dirty="0"/>
+              <a:t>Train a statistical or machine learning model</a:t>
+            </a:r>
+          </a:p>
+          <a:p>
+            <a:r>
+              <a:rPr lang="en-US" dirty="0"/>
+              <a:t>Use model for predictions</a:t>
+            </a:r>
+          </a:p>
+          <a:p>
+            <a:endParaRPr lang="en-US" dirty="0"/>
+          </a:p>
+          <a:p>
+            <a:endParaRPr lang="en-US" dirty="0"/>
+          </a:p>
+          <a:p>
+            <a:pPr marL="0" indent="0">
+              <a:buNone/>
+            </a:pPr>
+            <a:endParaRPr lang="en-US" dirty="0">
+              <a:solidFill>
+                <a:srgbClr val="7030A0"/>
+              </a:solidFill>
+            </a:endParaRPr>
+          </a:p>
+          <a:p>
+            <a:pPr marL="0" indent="0">
+              <a:buNone/>
+            </a:pPr>
+            <a:r>
+              <a:rPr lang="en-US" dirty="0">
+                <a:solidFill>
+                  <a:srgbClr val="7030A0"/>
+                </a:solidFill>
+              </a:rPr>
+              <a:t>Surrogate model approximates simulation output and replaces it.</a:t>
+            </a:r>
+            <a:endParaRPr lang="en-US" dirty="0"/>
           </a:p>
         </p:txBody>
       </p:sp>
     </p:spTree>
+    <p:extLst>
+      <p:ext uri="{BB962C8B-B14F-4D97-AF65-F5344CB8AC3E}">
+        <p14:creationId xmlns:p14="http://schemas.microsoft.com/office/powerpoint/2010/main" val="3636901660"/>
+      </p:ext>
+    </p:extLst>
+  </p:cSld>
+  <p:clrMapOvr>
+    <a:masterClrMapping/>
+  </p:clrMapOvr>
+</p:sld>
+</file>
+
+<file path=ppt/slides/slide7.xml><?xml version="1.0" encoding="utf-8"?>
+<p:sld xmlns:a="http://schemas.openxmlformats.org/drawingml/2006/main" xmlns:r="http://schemas.openxmlformats.org/officeDocument/2006/relationships" xmlns:p="http://schemas.openxmlformats.org/presentationml/2006/main">
+  <p:cSld>
+    <p:spTree>
+      <p:nvGrpSpPr>
+        <p:cNvPr id="1" name=""/>
+        <p:cNvGrpSpPr/>
+        <p:nvPr/>
+      </p:nvGrpSpPr>
+      <p:grpSpPr>
+        <a:xfrm>
+          <a:off x="0" y="0"/>
+          <a:ext cx="0" cy="0"/>
+          <a:chOff x="0" y="0"/>
+          <a:chExt cx="0" cy="0"/>
+        </a:xfrm>
+      </p:grpSpPr>
+      <p:sp>
+        <p:nvSpPr>
+          <p:cNvPr id="2" name="Title 1"/>
+          <p:cNvSpPr>
+            <a:spLocks noGrp="1"/>
+          </p:cNvSpPr>
+          <p:nvPr>
+            <p:ph type="title"/>
+          </p:nvPr>
+        </p:nvSpPr>
+        <p:spPr/>
+        <p:txBody>
+          <a:bodyPr>
+            <a:normAutofit/>
+          </a:bodyPr>
+          <a:lstStyle/>
+          <a:p>
+            <a:r>
+              <a:rPr lang="en-US" dirty="0"/>
+              <a:t>Surrogate Model – Concept</a:t>
+            </a:r>
+          </a:p>
+        </p:txBody>
+      </p:sp>
+      <p:sp>
+        <p:nvSpPr>
+          <p:cNvPr id="4" name="Content Placeholder 3"/>
+          <p:cNvSpPr>
+            <a:spLocks noGrp="1"/>
+          </p:cNvSpPr>
+          <p:nvPr>
+            <p:ph idx="1"/>
+          </p:nvPr>
+        </p:nvSpPr>
+        <p:spPr/>
+        <p:txBody>
+          <a:bodyPr>
+            <a:normAutofit fontScale="92500" lnSpcReduction="20000"/>
+          </a:bodyPr>
+          <a:lstStyle/>
+          <a:p>
+            <a:r>
+              <a:rPr lang="en-US" dirty="0"/>
+              <a:t>Inputs </a:t>
+            </a:r>
+          </a:p>
+          <a:p>
+            <a:pPr lvl="1"/>
+            <a:r>
+              <a:rPr lang="en-US" dirty="0"/>
+              <a:t>Design parameters (X</a:t>
+            </a:r>
+            <a:r>
+              <a:rPr lang="en-US" baseline="-25000" dirty="0"/>
+              <a:t>1</a:t>
+            </a:r>
+            <a:r>
+              <a:rPr lang="en-US" dirty="0"/>
+              <a:t>, X</a:t>
+            </a:r>
+            <a:r>
+              <a:rPr lang="en-US" baseline="-25000" dirty="0"/>
+              <a:t>2</a:t>
+            </a:r>
+            <a:r>
+              <a:rPr lang="en-US" dirty="0"/>
+              <a:t>, …, X</a:t>
+            </a:r>
+            <a:r>
+              <a:rPr lang="en-US" baseline="-25000" dirty="0"/>
+              <a:t>n</a:t>
+            </a:r>
+            <a:r>
+              <a:rPr lang="en-US" dirty="0"/>
+              <a:t>)</a:t>
+            </a:r>
+          </a:p>
+          <a:p>
+            <a:r>
+              <a:rPr lang="en-US" dirty="0"/>
+              <a:t>Simulation </a:t>
+            </a:r>
+          </a:p>
+          <a:p>
+            <a:pPr lvl="1"/>
+            <a:r>
+              <a:rPr lang="en-US" dirty="0"/>
+              <a:t>Expensive  </a:t>
+            </a:r>
+          </a:p>
+          <a:p>
+            <a:pPr lvl="1"/>
+            <a:r>
+              <a:rPr lang="en-US" dirty="0"/>
+              <a:t>f(X) = y</a:t>
+            </a:r>
+          </a:p>
+          <a:p>
+            <a:r>
+              <a:rPr lang="en-US" dirty="0"/>
+              <a:t>Surrogate</a:t>
+            </a:r>
+          </a:p>
+          <a:p>
+            <a:pPr lvl="1"/>
+            <a:r>
+              <a:rPr lang="en-US" dirty="0"/>
+              <a:t>Learned model </a:t>
+            </a:r>
+          </a:p>
+          <a:p>
+            <a:pPr lvl="1"/>
+            <a:r>
+              <a:rPr lang="en-US" dirty="0"/>
+              <a:t>f'(X) ≈ y</a:t>
+            </a:r>
+          </a:p>
+          <a:p>
+            <a:endParaRPr lang="en-US" dirty="0"/>
+          </a:p>
+          <a:p>
+            <a:pPr marL="0" indent="0">
+              <a:buNone/>
+            </a:pPr>
+            <a:r>
+              <a:rPr lang="en-US" dirty="0">
+                <a:solidFill>
+                  <a:srgbClr val="7030A0"/>
+                </a:solidFill>
+              </a:rPr>
+              <a:t>Surrogate model is faster, cheaper, and scalable.</a:t>
+            </a:r>
+          </a:p>
+          <a:p>
+            <a:endParaRPr lang="en-US" dirty="0"/>
+          </a:p>
+        </p:txBody>
+      </p:sp>
+    </p:spTree>
+    <p:extLst>
+      <p:ext uri="{BB962C8B-B14F-4D97-AF65-F5344CB8AC3E}">
+        <p14:creationId xmlns:p14="http://schemas.microsoft.com/office/powerpoint/2010/main" val="3898719603"/>
+      </p:ext>
+    </p:extLst>
+  </p:cSld>
+  <p:clrMapOvr>
+    <a:masterClrMapping/>
+  </p:clrMapOvr>
+</p:sld>
+</file>
+
+<file path=ppt/slides/slide8.xml><?xml version="1.0" encoding="utf-8"?>
+<p:sld xmlns:a="http://schemas.openxmlformats.org/drawingml/2006/main" xmlns:r="http://schemas.openxmlformats.org/officeDocument/2006/relationships" xmlns:p="http://schemas.openxmlformats.org/presentationml/2006/main">
+  <p:cSld>
+    <p:spTree>
+      <p:nvGrpSpPr>
+        <p:cNvPr id="1" name=""/>
+        <p:cNvGrpSpPr/>
+        <p:nvPr/>
+      </p:nvGrpSpPr>
+      <p:grpSpPr>
+        <a:xfrm>
+          <a:off x="0" y="0"/>
+          <a:ext cx="0" cy="0"/>
+          <a:chOff x="0" y="0"/>
+          <a:chExt cx="0" cy="0"/>
+        </a:xfrm>
+      </p:grpSpPr>
+      <p:sp>
+        <p:nvSpPr>
+          <p:cNvPr id="2" name="Title 1"/>
+          <p:cNvSpPr>
+            <a:spLocks noGrp="1"/>
+          </p:cNvSpPr>
+          <p:nvPr>
+            <p:ph type="title"/>
+          </p:nvPr>
+        </p:nvSpPr>
+        <p:spPr/>
+        <p:txBody>
+          <a:bodyPr>
+            <a:normAutofit/>
+          </a:bodyPr>
+          <a:lstStyle/>
+          <a:p>
+            <a:r>
+              <a:rPr lang="en-US" dirty="0"/>
+              <a:t>Surrogate Model – Benefits</a:t>
+            </a:r>
+          </a:p>
+        </p:txBody>
+      </p:sp>
+      <p:sp>
+        <p:nvSpPr>
+          <p:cNvPr id="4" name="Content Placeholder 3"/>
+          <p:cNvSpPr>
+            <a:spLocks noGrp="1"/>
+          </p:cNvSpPr>
+          <p:nvPr>
+            <p:ph idx="1"/>
+          </p:nvPr>
+        </p:nvSpPr>
+        <p:spPr/>
+        <p:txBody>
+          <a:bodyPr>
+            <a:normAutofit/>
+          </a:bodyPr>
+          <a:lstStyle/>
+          <a:p>
+            <a:r>
+              <a:rPr lang="en-US" dirty="0"/>
+              <a:t>Huge reduction in computation time</a:t>
+            </a:r>
+          </a:p>
+          <a:p>
+            <a:r>
+              <a:rPr lang="en-US" dirty="0"/>
+              <a:t>Real time analysis</a:t>
+            </a:r>
+          </a:p>
+          <a:p>
+            <a:r>
+              <a:rPr lang="en-US" dirty="0"/>
+              <a:t>Large scale optimization</a:t>
+            </a:r>
+          </a:p>
+          <a:p>
+            <a:r>
+              <a:rPr lang="en-US" dirty="0"/>
+              <a:t>Makes expensive tasks affordable</a:t>
+            </a:r>
+          </a:p>
+          <a:p>
+            <a:endParaRPr lang="en-US" dirty="0"/>
+          </a:p>
+          <a:p>
+            <a:pPr marL="0" indent="0">
+              <a:buNone/>
+            </a:pPr>
+            <a:endParaRPr lang="en-US">
+              <a:solidFill>
+                <a:srgbClr val="7030A0"/>
+              </a:solidFill>
+            </a:endParaRPr>
+          </a:p>
+          <a:p>
+            <a:pPr marL="0" indent="0">
+              <a:buNone/>
+            </a:pPr>
+            <a:r>
+              <a:rPr lang="en-US">
+                <a:solidFill>
+                  <a:srgbClr val="7030A0"/>
+                </a:solidFill>
+              </a:rPr>
+              <a:t>Thousands </a:t>
+            </a:r>
+            <a:r>
+              <a:rPr lang="en-US" dirty="0">
+                <a:solidFill>
+                  <a:srgbClr val="7030A0"/>
+                </a:solidFill>
+              </a:rPr>
+              <a:t>of evaluations become feasible.</a:t>
+            </a:r>
+            <a:endParaRPr lang="en-US" dirty="0"/>
+          </a:p>
+        </p:txBody>
+      </p:sp>
+    </p:spTree>
+    <p:extLst>
+      <p:ext uri="{BB962C8B-B14F-4D97-AF65-F5344CB8AC3E}">
+        <p14:creationId xmlns:p14="http://schemas.microsoft.com/office/powerpoint/2010/main" val="1531748995"/>
+      </p:ext>
+    </p:extLst>
+  </p:cSld>
+  <p:clrMapOvr>
+    <a:masterClrMapping/>
+  </p:clrMapOvr>
+</p:sld>
+</file>
+
+<file path=ppt/slides/slide9.xml><?xml version="1.0" encoding="utf-8"?>
+<p:sld xmlns:a="http://schemas.openxmlformats.org/drawingml/2006/main" xmlns:r="http://schemas.openxmlformats.org/officeDocument/2006/relationships" xmlns:p="http://schemas.openxmlformats.org/presentationml/2006/main">
+  <p:cSld>
+    <p:spTree>
+      <p:nvGrpSpPr>
+        <p:cNvPr id="1" name=""/>
+        <p:cNvGrpSpPr/>
+        <p:nvPr/>
+      </p:nvGrpSpPr>
+      <p:grpSpPr>
+        <a:xfrm>
+          <a:off x="0" y="0"/>
+          <a:ext cx="0" cy="0"/>
+          <a:chOff x="0" y="0"/>
+          <a:chExt cx="0" cy="0"/>
+        </a:xfrm>
+      </p:grpSpPr>
+      <p:sp>
+        <p:nvSpPr>
+          <p:cNvPr id="2" name="Title 1"/>
+          <p:cNvSpPr>
+            <a:spLocks noGrp="1"/>
+          </p:cNvSpPr>
+          <p:nvPr>
+            <p:ph type="title"/>
+          </p:nvPr>
+        </p:nvSpPr>
+        <p:spPr/>
+        <p:txBody>
+          <a:bodyPr>
+            <a:normAutofit/>
+          </a:bodyPr>
+          <a:lstStyle/>
+          <a:p>
+            <a:r>
+              <a:rPr lang="en-US" dirty="0"/>
+              <a:t>Surrogate Model – Characteristics</a:t>
+            </a:r>
+          </a:p>
+        </p:txBody>
+      </p:sp>
+      <p:sp>
+        <p:nvSpPr>
+          <p:cNvPr id="4" name="Content Placeholder 3"/>
+          <p:cNvSpPr>
+            <a:spLocks noGrp="1"/>
+          </p:cNvSpPr>
+          <p:nvPr>
+            <p:ph idx="1"/>
+          </p:nvPr>
+        </p:nvSpPr>
+        <p:spPr/>
+        <p:txBody>
+          <a:bodyPr>
+            <a:normAutofit/>
+          </a:bodyPr>
+          <a:lstStyle/>
+          <a:p>
+            <a:r>
+              <a:rPr lang="en-US" dirty="0"/>
+              <a:t>Surrogate model</a:t>
+            </a:r>
+          </a:p>
+          <a:p>
+            <a:pPr lvl="1"/>
+            <a:r>
+              <a:rPr lang="en-US" dirty="0"/>
+              <a:t>Metamodel</a:t>
+            </a:r>
+          </a:p>
+          <a:p>
+            <a:pPr lvl="1"/>
+            <a:r>
+              <a:rPr lang="en-US" dirty="0"/>
+              <a:t>Emulator</a:t>
+            </a:r>
+          </a:p>
+          <a:p>
+            <a:r>
+              <a:rPr lang="en-US" dirty="0"/>
+              <a:t>Built using sampled data</a:t>
+            </a:r>
+          </a:p>
+          <a:p>
+            <a:r>
+              <a:rPr lang="en-US" dirty="0"/>
+              <a:t>Requires:</a:t>
+            </a:r>
+          </a:p>
+          <a:p>
+            <a:pPr lvl="1"/>
+            <a:r>
+              <a:rPr lang="en-US" dirty="0"/>
+              <a:t>Careful data collection</a:t>
+            </a:r>
+          </a:p>
+          <a:p>
+            <a:pPr lvl="1"/>
+            <a:r>
+              <a:rPr lang="en-US" dirty="0"/>
+              <a:t>Model validation</a:t>
+            </a:r>
+          </a:p>
+          <a:p>
+            <a:pPr marL="0" indent="0">
+              <a:buNone/>
+            </a:pPr>
+            <a:endParaRPr lang="en-US" dirty="0"/>
+          </a:p>
+        </p:txBody>
+      </p:sp>
+    </p:spTree>
+    <p:extLst>
+      <p:ext uri="{BB962C8B-B14F-4D97-AF65-F5344CB8AC3E}">
+        <p14:creationId xmlns:p14="http://schemas.microsoft.com/office/powerpoint/2010/main" val="1167000598"/>
+      </p:ext>
+    </p:extLst>
   </p:cSld>
   <p:clrMapOvr>
     <a:masterClrMapping/>

--- a/Presentations/SurrogateModel.pptx
+++ b/Presentations/SurrogateModel.pptx
@@ -5,7 +5,7 @@
     <p:sldMasterId id="2147483648" r:id="rId1"/>
   </p:sldMasterIdLst>
   <p:notesMasterIdLst>
-    <p:notesMasterId r:id="rId12"/>
+    <p:notesMasterId r:id="rId16"/>
   </p:notesMasterIdLst>
   <p:sldIdLst>
     <p:sldId id="256" r:id="rId2"/>
@@ -17,7 +17,11 @@
     <p:sldId id="281" r:id="rId8"/>
     <p:sldId id="282" r:id="rId9"/>
     <p:sldId id="283" r:id="rId10"/>
-    <p:sldId id="269" r:id="rId11"/>
+    <p:sldId id="284" r:id="rId11"/>
+    <p:sldId id="285" r:id="rId12"/>
+    <p:sldId id="286" r:id="rId13"/>
+    <p:sldId id="287" r:id="rId14"/>
+    <p:sldId id="269" r:id="rId15"/>
   </p:sldIdLst>
   <p:sldSz cx="9144000" cy="6858000" type="screen4x3"/>
   <p:notesSz cx="6858000" cy="9144000"/>
@@ -3510,6 +3514,446 @@
             <a:spLocks noGrp="1"/>
           </p:cNvSpPr>
           <p:nvPr>
+            <p:ph type="title"/>
+          </p:nvPr>
+        </p:nvSpPr>
+        <p:spPr/>
+        <p:txBody>
+          <a:bodyPr>
+            <a:normAutofit/>
+          </a:bodyPr>
+          <a:lstStyle/>
+          <a:p>
+            <a:r>
+              <a:rPr lang="en-US" dirty="0"/>
+              <a:t>Surrogate Model – Workflow</a:t>
+            </a:r>
+          </a:p>
+        </p:txBody>
+      </p:sp>
+      <p:sp>
+        <p:nvSpPr>
+          <p:cNvPr id="4" name="Content Placeholder 3"/>
+          <p:cNvSpPr>
+            <a:spLocks noGrp="1"/>
+          </p:cNvSpPr>
+          <p:nvPr>
+            <p:ph idx="1"/>
+          </p:nvPr>
+        </p:nvSpPr>
+        <p:spPr/>
+        <p:txBody>
+          <a:bodyPr>
+            <a:normAutofit/>
+          </a:bodyPr>
+          <a:lstStyle/>
+          <a:p>
+            <a:r>
+              <a:rPr lang="en-US" dirty="0"/>
+              <a:t>Sampling – Design of Experiments</a:t>
+            </a:r>
+          </a:p>
+          <a:p>
+            <a:r>
+              <a:rPr lang="en-US" dirty="0"/>
+              <a:t>Run simulations</a:t>
+            </a:r>
+          </a:p>
+          <a:p>
+            <a:r>
+              <a:rPr lang="en-US" dirty="0"/>
+              <a:t>Train surrogate model</a:t>
+            </a:r>
+          </a:p>
+          <a:p>
+            <a:r>
+              <a:rPr lang="en-US" dirty="0"/>
+              <a:t>Improve using active learning</a:t>
+            </a:r>
+          </a:p>
+          <a:p>
+            <a:pPr marL="0" indent="0">
+              <a:buNone/>
+            </a:pPr>
+            <a:endParaRPr lang="en-US" dirty="0"/>
+          </a:p>
+        </p:txBody>
+      </p:sp>
+    </p:spTree>
+    <p:extLst>
+      <p:ext uri="{BB962C8B-B14F-4D97-AF65-F5344CB8AC3E}">
+        <p14:creationId xmlns:p14="http://schemas.microsoft.com/office/powerpoint/2010/main" val="301591466"/>
+      </p:ext>
+    </p:extLst>
+  </p:cSld>
+  <p:clrMapOvr>
+    <a:masterClrMapping/>
+  </p:clrMapOvr>
+</p:sld>
+</file>
+
+<file path=ppt/slides/slide11.xml><?xml version="1.0" encoding="utf-8"?>
+<p:sld xmlns:a="http://schemas.openxmlformats.org/drawingml/2006/main" xmlns:r="http://schemas.openxmlformats.org/officeDocument/2006/relationships" xmlns:p="http://schemas.openxmlformats.org/presentationml/2006/main">
+  <p:cSld>
+    <p:spTree>
+      <p:nvGrpSpPr>
+        <p:cNvPr id="1" name=""/>
+        <p:cNvGrpSpPr/>
+        <p:nvPr/>
+      </p:nvGrpSpPr>
+      <p:grpSpPr>
+        <a:xfrm>
+          <a:off x="0" y="0"/>
+          <a:ext cx="0" cy="0"/>
+          <a:chOff x="0" y="0"/>
+          <a:chExt cx="0" cy="0"/>
+        </a:xfrm>
+      </p:grpSpPr>
+      <p:sp>
+        <p:nvSpPr>
+          <p:cNvPr id="2" name="Title 1"/>
+          <p:cNvSpPr>
+            <a:spLocks noGrp="1"/>
+          </p:cNvSpPr>
+          <p:nvPr>
+            <p:ph type="title"/>
+          </p:nvPr>
+        </p:nvSpPr>
+        <p:spPr/>
+        <p:txBody>
+          <a:bodyPr>
+            <a:normAutofit/>
+          </a:bodyPr>
+          <a:lstStyle/>
+          <a:p>
+            <a:r>
+              <a:rPr lang="en-US" dirty="0"/>
+              <a:t>Surrogate Model – Sampling</a:t>
+            </a:r>
+          </a:p>
+        </p:txBody>
+      </p:sp>
+      <p:sp>
+        <p:nvSpPr>
+          <p:cNvPr id="4" name="Content Placeholder 3"/>
+          <p:cNvSpPr>
+            <a:spLocks noGrp="1"/>
+          </p:cNvSpPr>
+          <p:nvPr>
+            <p:ph idx="1"/>
+          </p:nvPr>
+        </p:nvSpPr>
+        <p:spPr/>
+        <p:txBody>
+          <a:bodyPr>
+            <a:normAutofit/>
+          </a:bodyPr>
+          <a:lstStyle/>
+          <a:p>
+            <a:r>
+              <a:rPr lang="en-US" dirty="0"/>
+              <a:t>Select input points carefully</a:t>
+            </a:r>
+          </a:p>
+          <a:p>
+            <a:r>
+              <a:rPr lang="en-US" dirty="0"/>
+              <a:t>Goal</a:t>
+            </a:r>
+          </a:p>
+          <a:p>
+            <a:pPr lvl="1"/>
+            <a:r>
+              <a:rPr lang="en-US" dirty="0"/>
+              <a:t>Cover entire parameter space</a:t>
+            </a:r>
+          </a:p>
+          <a:p>
+            <a:r>
+              <a:rPr lang="en-US" dirty="0"/>
+              <a:t>Technique</a:t>
+            </a:r>
+          </a:p>
+          <a:p>
+            <a:pPr lvl="1"/>
+            <a:r>
+              <a:rPr lang="en-US" dirty="0"/>
+              <a:t>Latin Hypercube Sampling</a:t>
+            </a:r>
+          </a:p>
+          <a:p>
+            <a:r>
+              <a:rPr lang="en-US" dirty="0"/>
+              <a:t>Ensure representative dataset</a:t>
+            </a:r>
+          </a:p>
+          <a:p>
+            <a:pPr marL="0" indent="0">
+              <a:buNone/>
+            </a:pPr>
+            <a:endParaRPr lang="en-US" dirty="0"/>
+          </a:p>
+        </p:txBody>
+      </p:sp>
+    </p:spTree>
+    <p:extLst>
+      <p:ext uri="{BB962C8B-B14F-4D97-AF65-F5344CB8AC3E}">
+        <p14:creationId xmlns:p14="http://schemas.microsoft.com/office/powerpoint/2010/main" val="2594846989"/>
+      </p:ext>
+    </p:extLst>
+  </p:cSld>
+  <p:clrMapOvr>
+    <a:masterClrMapping/>
+  </p:clrMapOvr>
+</p:sld>
+</file>
+
+<file path=ppt/slides/slide12.xml><?xml version="1.0" encoding="utf-8"?>
+<p:sld xmlns:a="http://schemas.openxmlformats.org/drawingml/2006/main" xmlns:r="http://schemas.openxmlformats.org/officeDocument/2006/relationships" xmlns:p="http://schemas.openxmlformats.org/presentationml/2006/main">
+  <p:cSld>
+    <p:spTree>
+      <p:nvGrpSpPr>
+        <p:cNvPr id="1" name=""/>
+        <p:cNvGrpSpPr/>
+        <p:nvPr/>
+      </p:nvGrpSpPr>
+      <p:grpSpPr>
+        <a:xfrm>
+          <a:off x="0" y="0"/>
+          <a:ext cx="0" cy="0"/>
+          <a:chOff x="0" y="0"/>
+          <a:chExt cx="0" cy="0"/>
+        </a:xfrm>
+      </p:grpSpPr>
+      <p:sp>
+        <p:nvSpPr>
+          <p:cNvPr id="2" name="Title 1"/>
+          <p:cNvSpPr>
+            <a:spLocks noGrp="1"/>
+          </p:cNvSpPr>
+          <p:nvPr>
+            <p:ph type="title"/>
+          </p:nvPr>
+        </p:nvSpPr>
+        <p:spPr/>
+        <p:txBody>
+          <a:bodyPr>
+            <a:normAutofit/>
+          </a:bodyPr>
+          <a:lstStyle/>
+          <a:p>
+            <a:r>
+              <a:rPr lang="en-US" dirty="0"/>
+              <a:t>Surrogate Model – Simulations</a:t>
+            </a:r>
+          </a:p>
+        </p:txBody>
+      </p:sp>
+      <p:sp>
+        <p:nvSpPr>
+          <p:cNvPr id="4" name="Content Placeholder 3"/>
+          <p:cNvSpPr>
+            <a:spLocks noGrp="1"/>
+          </p:cNvSpPr>
+          <p:nvPr>
+            <p:ph idx="1"/>
+          </p:nvPr>
+        </p:nvSpPr>
+        <p:spPr/>
+        <p:txBody>
+          <a:bodyPr>
+            <a:normAutofit/>
+          </a:bodyPr>
+          <a:lstStyle/>
+          <a:p>
+            <a:r>
+              <a:rPr lang="en-US" dirty="0"/>
+              <a:t>Run simulations for selected inputs</a:t>
+            </a:r>
+          </a:p>
+          <a:p>
+            <a:r>
+              <a:rPr lang="en-US" dirty="0"/>
+              <a:t>Collect</a:t>
+            </a:r>
+          </a:p>
+          <a:p>
+            <a:pPr lvl="1"/>
+            <a:r>
+              <a:rPr lang="en-US" dirty="0"/>
+              <a:t>Input and Output pairs (X, y)</a:t>
+            </a:r>
+          </a:p>
+          <a:p>
+            <a:r>
+              <a:rPr lang="en-US" dirty="0"/>
+              <a:t>Simulation dataset</a:t>
+            </a:r>
+          </a:p>
+          <a:p>
+            <a:pPr marL="0" indent="0">
+              <a:buNone/>
+            </a:pPr>
+            <a:endParaRPr lang="en-US" dirty="0"/>
+          </a:p>
+        </p:txBody>
+      </p:sp>
+    </p:spTree>
+    <p:extLst>
+      <p:ext uri="{BB962C8B-B14F-4D97-AF65-F5344CB8AC3E}">
+        <p14:creationId xmlns:p14="http://schemas.microsoft.com/office/powerpoint/2010/main" val="831949061"/>
+      </p:ext>
+    </p:extLst>
+  </p:cSld>
+  <p:clrMapOvr>
+    <a:masterClrMapping/>
+  </p:clrMapOvr>
+</p:sld>
+</file>
+
+<file path=ppt/slides/slide13.xml><?xml version="1.0" encoding="utf-8"?>
+<p:sld xmlns:a="http://schemas.openxmlformats.org/drawingml/2006/main" xmlns:r="http://schemas.openxmlformats.org/officeDocument/2006/relationships" xmlns:p="http://schemas.openxmlformats.org/presentationml/2006/main">
+  <p:cSld>
+    <p:spTree>
+      <p:nvGrpSpPr>
+        <p:cNvPr id="1" name=""/>
+        <p:cNvGrpSpPr/>
+        <p:nvPr/>
+      </p:nvGrpSpPr>
+      <p:grpSpPr>
+        <a:xfrm>
+          <a:off x="0" y="0"/>
+          <a:ext cx="0" cy="0"/>
+          <a:chOff x="0" y="0"/>
+          <a:chExt cx="0" cy="0"/>
+        </a:xfrm>
+      </p:grpSpPr>
+      <p:sp>
+        <p:nvSpPr>
+          <p:cNvPr id="2" name="Title 1"/>
+          <p:cNvSpPr>
+            <a:spLocks noGrp="1"/>
+          </p:cNvSpPr>
+          <p:nvPr>
+            <p:ph type="title"/>
+          </p:nvPr>
+        </p:nvSpPr>
+        <p:spPr/>
+        <p:txBody>
+          <a:bodyPr>
+            <a:normAutofit fontScale="90000"/>
+          </a:bodyPr>
+          <a:lstStyle/>
+          <a:p>
+            <a:r>
+              <a:rPr lang="en-US" dirty="0"/>
+              <a:t>Surrogate Model – Model Construction</a:t>
+            </a:r>
+          </a:p>
+        </p:txBody>
+      </p:sp>
+      <p:sp>
+        <p:nvSpPr>
+          <p:cNvPr id="4" name="Content Placeholder 3"/>
+          <p:cNvSpPr>
+            <a:spLocks noGrp="1"/>
+          </p:cNvSpPr>
+          <p:nvPr>
+            <p:ph idx="1"/>
+          </p:nvPr>
+        </p:nvSpPr>
+        <p:spPr/>
+        <p:txBody>
+          <a:bodyPr>
+            <a:normAutofit/>
+          </a:bodyPr>
+          <a:lstStyle/>
+          <a:p>
+            <a:r>
+              <a:rPr lang="en-US" dirty="0"/>
+              <a:t>Train Machine Learning model on dataset</a:t>
+            </a:r>
+          </a:p>
+          <a:p>
+            <a:r>
+              <a:rPr lang="en-US" dirty="0"/>
+              <a:t>Use</a:t>
+            </a:r>
+          </a:p>
+          <a:p>
+            <a:pPr lvl="1"/>
+            <a:r>
+              <a:rPr lang="en-US" dirty="0"/>
+              <a:t>Validation</a:t>
+            </a:r>
+          </a:p>
+          <a:p>
+            <a:pPr lvl="1"/>
+            <a:r>
+              <a:rPr lang="en-US" dirty="0"/>
+              <a:t>Model selection</a:t>
+            </a:r>
+          </a:p>
+          <a:p>
+            <a:r>
+              <a:rPr lang="en-US" dirty="0"/>
+              <a:t>Improve using</a:t>
+            </a:r>
+          </a:p>
+          <a:p>
+            <a:pPr lvl="1"/>
+            <a:r>
+              <a:rPr lang="en-US" dirty="0"/>
+              <a:t>Bagging</a:t>
+            </a:r>
+          </a:p>
+          <a:p>
+            <a:pPr lvl="1"/>
+            <a:r>
+              <a:rPr lang="en-US"/>
+              <a:t>Boosting</a:t>
+            </a:r>
+            <a:endParaRPr lang="en-US" dirty="0"/>
+          </a:p>
+        </p:txBody>
+      </p:sp>
+    </p:spTree>
+    <p:extLst>
+      <p:ext uri="{BB962C8B-B14F-4D97-AF65-F5344CB8AC3E}">
+        <p14:creationId xmlns:p14="http://schemas.microsoft.com/office/powerpoint/2010/main" val="2210710025"/>
+      </p:ext>
+    </p:extLst>
+  </p:cSld>
+  <p:clrMapOvr>
+    <a:masterClrMapping/>
+  </p:clrMapOvr>
+</p:sld>
+</file>
+
+<file path=ppt/slides/slide14.xml><?xml version="1.0" encoding="utf-8"?>
+<p:sld xmlns:a="http://schemas.openxmlformats.org/drawingml/2006/main" xmlns:r="http://schemas.openxmlformats.org/officeDocument/2006/relationships" xmlns:p="http://schemas.openxmlformats.org/presentationml/2006/main">
+  <p:cSld>
+    <p:spTree>
+      <p:nvGrpSpPr>
+        <p:cNvPr id="1" name=""/>
+        <p:cNvGrpSpPr/>
+        <p:nvPr/>
+      </p:nvGrpSpPr>
+      <p:grpSpPr>
+        <a:xfrm>
+          <a:off x="0" y="0"/>
+          <a:ext cx="0" cy="0"/>
+          <a:chOff x="0" y="0"/>
+          <a:chExt cx="0" cy="0"/>
+        </a:xfrm>
+      </p:grpSpPr>
+      <p:sp>
+        <p:nvSpPr>
+          <p:cNvPr id="2" name="Title 1"/>
+          <p:cNvSpPr>
+            <a:spLocks noGrp="1"/>
+          </p:cNvSpPr>
+          <p:nvPr>
             <p:ph type="ctrTitle"/>
           </p:nvPr>
         </p:nvSpPr>
@@ -3629,7 +4073,10 @@
             </a:r>
           </a:p>
           <a:p>
-            <a:endParaRPr lang="en-US" dirty="0"/>
+            <a:r>
+              <a:rPr lang="en-US" dirty="0"/>
+              <a:t>Surrogate Model – Workflow</a:t>
+            </a:r>
           </a:p>
         </p:txBody>
       </p:sp>

--- a/Presentations/SurrogateModel.pptx
+++ b/Presentations/SurrogateModel.pptx
@@ -5,7 +5,7 @@
     <p:sldMasterId id="2147483648" r:id="rId1"/>
   </p:sldMasterIdLst>
   <p:notesMasterIdLst>
-    <p:notesMasterId r:id="rId16"/>
+    <p:notesMasterId r:id="rId22"/>
   </p:notesMasterIdLst>
   <p:sldIdLst>
     <p:sldId id="256" r:id="rId2"/>
@@ -13,15 +13,21 @@
     <p:sldId id="272" r:id="rId4"/>
     <p:sldId id="278" r:id="rId5"/>
     <p:sldId id="279" r:id="rId6"/>
-    <p:sldId id="280" r:id="rId7"/>
-    <p:sldId id="281" r:id="rId8"/>
-    <p:sldId id="282" r:id="rId9"/>
-    <p:sldId id="283" r:id="rId10"/>
-    <p:sldId id="284" r:id="rId11"/>
-    <p:sldId id="285" r:id="rId12"/>
-    <p:sldId id="286" r:id="rId13"/>
-    <p:sldId id="287" r:id="rId14"/>
-    <p:sldId id="269" r:id="rId15"/>
+    <p:sldId id="293" r:id="rId7"/>
+    <p:sldId id="282" r:id="rId8"/>
+    <p:sldId id="280" r:id="rId9"/>
+    <p:sldId id="281" r:id="rId10"/>
+    <p:sldId id="283" r:id="rId11"/>
+    <p:sldId id="284" r:id="rId12"/>
+    <p:sldId id="285" r:id="rId13"/>
+    <p:sldId id="286" r:id="rId14"/>
+    <p:sldId id="287" r:id="rId15"/>
+    <p:sldId id="288" r:id="rId16"/>
+    <p:sldId id="289" r:id="rId17"/>
+    <p:sldId id="290" r:id="rId18"/>
+    <p:sldId id="291" r:id="rId19"/>
+    <p:sldId id="292" r:id="rId20"/>
+    <p:sldId id="269" r:id="rId21"/>
   </p:sldIdLst>
   <p:sldSz cx="9144000" cy="6858000" type="screen4x3"/>
   <p:notesSz cx="6858000" cy="9144000"/>
@@ -3526,7 +3532,7 @@
           <a:p>
             <a:r>
               <a:rPr lang="en-US" dirty="0"/>
-              <a:t>Surrogate Model – Workflow</a:t>
+              <a:t>Surrogate Model – Characteristics</a:t>
             </a:r>
           </a:p>
         </p:txBody>
@@ -3550,25 +3556,47 @@
           <a:p>
             <a:r>
               <a:rPr lang="en-US" dirty="0"/>
-              <a:t>Sampling – Design of Experiments</a:t>
-            </a:r>
-          </a:p>
-          <a:p>
-            <a:r>
-              <a:rPr lang="en-US" dirty="0"/>
-              <a:t>Run simulations</a:t>
-            </a:r>
-          </a:p>
-          <a:p>
-            <a:r>
-              <a:rPr lang="en-US" dirty="0"/>
-              <a:t>Train surrogate model</a:t>
-            </a:r>
-          </a:p>
-          <a:p>
-            <a:r>
-              <a:rPr lang="en-US" dirty="0"/>
-              <a:t>Improve using active learning</a:t>
+              <a:t>Surrogate model</a:t>
+            </a:r>
+          </a:p>
+          <a:p>
+            <a:pPr lvl="1"/>
+            <a:r>
+              <a:rPr lang="en-US" dirty="0"/>
+              <a:t>Metamodel</a:t>
+            </a:r>
+          </a:p>
+          <a:p>
+            <a:pPr lvl="1"/>
+            <a:r>
+              <a:rPr lang="en-US" dirty="0"/>
+              <a:t>Emulator</a:t>
+            </a:r>
+          </a:p>
+          <a:p>
+            <a:r>
+              <a:rPr lang="en-US" dirty="0"/>
+              <a:t>Built using sampled data</a:t>
+            </a:r>
+          </a:p>
+          <a:p>
+            <a:r>
+              <a:rPr lang="en-US" dirty="0"/>
+              <a:t>Requires:</a:t>
+            </a:r>
+          </a:p>
+          <a:p>
+            <a:pPr lvl="1"/>
+            <a:r>
+              <a:rPr lang="en-US" dirty="0"/>
+              <a:t>Careful data collection</a:t>
+            </a:r>
+          </a:p>
+          <a:p>
+            <a:pPr lvl="1"/>
+            <a:r>
+              <a:rPr lang="en-US" dirty="0"/>
+              <a:t>Model validation</a:t>
             </a:r>
           </a:p>
           <a:p>
@@ -3582,7 +3610,7 @@
     </p:spTree>
     <p:extLst>
       <p:ext uri="{BB962C8B-B14F-4D97-AF65-F5344CB8AC3E}">
-        <p14:creationId xmlns:p14="http://schemas.microsoft.com/office/powerpoint/2010/main" val="301591466"/>
+        <p14:creationId xmlns:p14="http://schemas.microsoft.com/office/powerpoint/2010/main" val="1167000598"/>
       </p:ext>
     </p:extLst>
   </p:cSld>
@@ -3628,7 +3656,7 @@
           <a:p>
             <a:r>
               <a:rPr lang="en-US" dirty="0"/>
-              <a:t>Surrogate Model – Sampling</a:t>
+              <a:t>Surrogate Model – How?</a:t>
             </a:r>
           </a:p>
         </p:txBody>
@@ -3652,39 +3680,25 @@
           <a:p>
             <a:r>
               <a:rPr lang="en-US" dirty="0"/>
-              <a:t>Select input points carefully</a:t>
-            </a:r>
-          </a:p>
-          <a:p>
-            <a:r>
-              <a:rPr lang="en-US" dirty="0"/>
-              <a:t>Goal</a:t>
-            </a:r>
-          </a:p>
-          <a:p>
-            <a:pPr lvl="1"/>
-            <a:r>
-              <a:rPr lang="en-US" dirty="0"/>
-              <a:t>Cover entire parameter space</a:t>
-            </a:r>
-          </a:p>
-          <a:p>
-            <a:r>
-              <a:rPr lang="en-US" dirty="0"/>
-              <a:t>Technique</a:t>
-            </a:r>
-          </a:p>
-          <a:p>
-            <a:pPr lvl="1"/>
-            <a:r>
-              <a:rPr lang="en-US" dirty="0"/>
-              <a:t>Latin Hypercube Sampling</a:t>
-            </a:r>
-          </a:p>
-          <a:p>
-            <a:r>
-              <a:rPr lang="en-US" dirty="0"/>
-              <a:t>Ensure representative dataset</a:t>
+              <a:t>Sampling – Design of Experiments</a:t>
+            </a:r>
+          </a:p>
+          <a:p>
+            <a:r>
+              <a:rPr lang="en-US" dirty="0"/>
+              <a:t>Run simulations</a:t>
+            </a:r>
+          </a:p>
+          <a:p>
+            <a:r>
+              <a:rPr lang="en-US" dirty="0"/>
+              <a:t>Train surrogate model</a:t>
+            </a:r>
+          </a:p>
+          <a:p>
+            <a:r>
+              <a:rPr lang="en-US" dirty="0"/>
+              <a:t>Improve using active learning</a:t>
             </a:r>
           </a:p>
           <a:p>
@@ -3698,7 +3712,7 @@
     </p:spTree>
     <p:extLst>
       <p:ext uri="{BB962C8B-B14F-4D97-AF65-F5344CB8AC3E}">
-        <p14:creationId xmlns:p14="http://schemas.microsoft.com/office/powerpoint/2010/main" val="2594846989"/>
+        <p14:creationId xmlns:p14="http://schemas.microsoft.com/office/powerpoint/2010/main" val="301591466"/>
       </p:ext>
     </p:extLst>
   </p:cSld>
@@ -3744,7 +3758,7 @@
           <a:p>
             <a:r>
               <a:rPr lang="en-US" dirty="0"/>
-              <a:t>Surrogate Model – Simulations</a:t>
+              <a:t>Surrogate Model – Sampling</a:t>
             </a:r>
           </a:p>
         </p:txBody>
@@ -3768,26 +3782,39 @@
           <a:p>
             <a:r>
               <a:rPr lang="en-US" dirty="0"/>
-              <a:t>Run simulations for selected inputs</a:t>
-            </a:r>
-          </a:p>
-          <a:p>
-            <a:r>
-              <a:rPr lang="en-US" dirty="0"/>
-              <a:t>Collect</a:t>
+              <a:t>Select input points carefully</a:t>
+            </a:r>
+          </a:p>
+          <a:p>
+            <a:r>
+              <a:rPr lang="en-US" dirty="0"/>
+              <a:t>Goal</a:t>
             </a:r>
           </a:p>
           <a:p>
             <a:pPr lvl="1"/>
             <a:r>
               <a:rPr lang="en-US" dirty="0"/>
-              <a:t>Input and Output pairs (X, y)</a:t>
-            </a:r>
-          </a:p>
-          <a:p>
-            <a:r>
-              <a:rPr lang="en-US" dirty="0"/>
-              <a:t>Simulation dataset</a:t>
+              <a:t>Cover entire parameter space</a:t>
+            </a:r>
+          </a:p>
+          <a:p>
+            <a:r>
+              <a:rPr lang="en-US" dirty="0"/>
+              <a:t>Technique</a:t>
+            </a:r>
+          </a:p>
+          <a:p>
+            <a:pPr lvl="1"/>
+            <a:r>
+              <a:rPr lang="en-US" dirty="0"/>
+              <a:t>Latin Hypercube Sampling</a:t>
+            </a:r>
+          </a:p>
+          <a:p>
+            <a:r>
+              <a:rPr lang="en-US" dirty="0"/>
+              <a:t>Ensure representative dataset</a:t>
             </a:r>
           </a:p>
           <a:p>
@@ -3801,7 +3828,7 @@
     </p:spTree>
     <p:extLst>
       <p:ext uri="{BB962C8B-B14F-4D97-AF65-F5344CB8AC3E}">
-        <p14:creationId xmlns:p14="http://schemas.microsoft.com/office/powerpoint/2010/main" val="831949061"/>
+        <p14:creationId xmlns:p14="http://schemas.microsoft.com/office/powerpoint/2010/main" val="2594846989"/>
       </p:ext>
     </p:extLst>
   </p:cSld>
@@ -3841,13 +3868,13 @@
         <p:spPr/>
         <p:txBody>
           <a:bodyPr>
-            <a:normAutofit fontScale="90000"/>
+            <a:normAutofit/>
           </a:bodyPr>
           <a:lstStyle/>
           <a:p>
             <a:r>
               <a:rPr lang="en-US" dirty="0"/>
-              <a:t>Surrogate Model – Model Construction</a:t>
+              <a:t>Surrogate Model – Simulations</a:t>
             </a:r>
           </a:p>
         </p:txBody>
@@ -3871,48 +3898,32 @@
           <a:p>
             <a:r>
               <a:rPr lang="en-US" dirty="0"/>
-              <a:t>Train Machine Learning model on dataset</a:t>
-            </a:r>
-          </a:p>
-          <a:p>
-            <a:r>
-              <a:rPr lang="en-US" dirty="0"/>
-              <a:t>Use</a:t>
+              <a:t>Run simulations for selected inputs</a:t>
+            </a:r>
+          </a:p>
+          <a:p>
+            <a:r>
+              <a:rPr lang="en-US" dirty="0"/>
+              <a:t>Collect</a:t>
             </a:r>
           </a:p>
           <a:p>
             <a:pPr lvl="1"/>
             <a:r>
               <a:rPr lang="en-US" dirty="0"/>
-              <a:t>Validation</a:t>
-            </a:r>
-          </a:p>
-          <a:p>
-            <a:pPr lvl="1"/>
-            <a:r>
-              <a:rPr lang="en-US" dirty="0"/>
-              <a:t>Model selection</a:t>
-            </a:r>
-          </a:p>
-          <a:p>
-            <a:r>
-              <a:rPr lang="en-US" dirty="0"/>
-              <a:t>Improve using</a:t>
-            </a:r>
-          </a:p>
-          <a:p>
-            <a:pPr lvl="1"/>
-            <a:r>
-              <a:rPr lang="en-US" dirty="0"/>
-              <a:t>Bagging</a:t>
-            </a:r>
-          </a:p>
-          <a:p>
-            <a:pPr lvl="1"/>
-            <a:r>
-              <a:rPr lang="en-US"/>
-              <a:t>Boosting</a:t>
-            </a:r>
+              <a:t>Input and Output pairs (X, y)</a:t>
+            </a:r>
+          </a:p>
+          <a:p>
+            <a:r>
+              <a:rPr lang="en-US" dirty="0"/>
+              <a:t>Simulation dataset</a:t>
+            </a:r>
+          </a:p>
+          <a:p>
+            <a:pPr marL="0" indent="0">
+              <a:buNone/>
+            </a:pPr>
             <a:endParaRPr lang="en-US" dirty="0"/>
           </a:p>
         </p:txBody>
@@ -3920,7 +3931,7 @@
     </p:spTree>
     <p:extLst>
       <p:ext uri="{BB962C8B-B14F-4D97-AF65-F5344CB8AC3E}">
-        <p14:creationId xmlns:p14="http://schemas.microsoft.com/office/powerpoint/2010/main" val="2210710025"/>
+        <p14:creationId xmlns:p14="http://schemas.microsoft.com/office/powerpoint/2010/main" val="831949061"/>
       </p:ext>
     </p:extLst>
   </p:cSld>
@@ -3954,44 +3965,649 @@
             <a:spLocks noGrp="1"/>
           </p:cNvSpPr>
           <p:nvPr>
-            <p:ph type="ctrTitle"/>
-          </p:nvPr>
-        </p:nvSpPr>
-        <p:spPr/>
-        <p:txBody>
-          <a:bodyPr/>
-          <a:lstStyle/>
-          <a:p>
-            <a:r>
-              <a:rPr lang="en-US" dirty="0"/>
-              <a:t>Questions?</a:t>
-            </a:r>
-          </a:p>
-        </p:txBody>
-      </p:sp>
-      <p:sp>
-        <p:nvSpPr>
-          <p:cNvPr id="3" name="Subtitle 2"/>
-          <p:cNvSpPr>
-            <a:spLocks noGrp="1"/>
-          </p:cNvSpPr>
-          <p:nvPr>
-            <p:ph type="subTitle" idx="1"/>
-          </p:nvPr>
-        </p:nvSpPr>
-        <p:spPr/>
-        <p:txBody>
-          <a:bodyPr/>
-          <a:lstStyle/>
-          <a:p>
-            <a:r>
-              <a:rPr lang="en-US" dirty="0"/>
-              <a:t>Thank you</a:t>
-            </a:r>
+            <p:ph type="title"/>
+          </p:nvPr>
+        </p:nvSpPr>
+        <p:spPr/>
+        <p:txBody>
+          <a:bodyPr>
+            <a:normAutofit fontScale="90000"/>
+          </a:bodyPr>
+          <a:lstStyle/>
+          <a:p>
+            <a:r>
+              <a:rPr lang="en-US" dirty="0"/>
+              <a:t>Surrogate Model – Model Construction</a:t>
+            </a:r>
+          </a:p>
+        </p:txBody>
+      </p:sp>
+      <p:sp>
+        <p:nvSpPr>
+          <p:cNvPr id="4" name="Content Placeholder 3"/>
+          <p:cNvSpPr>
+            <a:spLocks noGrp="1"/>
+          </p:cNvSpPr>
+          <p:nvPr>
+            <p:ph idx="1"/>
+          </p:nvPr>
+        </p:nvSpPr>
+        <p:spPr/>
+        <p:txBody>
+          <a:bodyPr>
+            <a:normAutofit/>
+          </a:bodyPr>
+          <a:lstStyle/>
+          <a:p>
+            <a:r>
+              <a:rPr lang="en-US" dirty="0"/>
+              <a:t>Train Machine Learning model on dataset</a:t>
+            </a:r>
+          </a:p>
+          <a:p>
+            <a:r>
+              <a:rPr lang="en-US" dirty="0"/>
+              <a:t>Use</a:t>
+            </a:r>
+          </a:p>
+          <a:p>
+            <a:pPr lvl="1"/>
+            <a:r>
+              <a:rPr lang="en-US" dirty="0"/>
+              <a:t>Validation</a:t>
+            </a:r>
+          </a:p>
+          <a:p>
+            <a:pPr lvl="1"/>
+            <a:r>
+              <a:rPr lang="en-US" dirty="0"/>
+              <a:t>Model selection</a:t>
+            </a:r>
+          </a:p>
+          <a:p>
+            <a:r>
+              <a:rPr lang="en-US" dirty="0"/>
+              <a:t>Improve using</a:t>
+            </a:r>
+          </a:p>
+          <a:p>
+            <a:pPr lvl="1"/>
+            <a:r>
+              <a:rPr lang="en-US" dirty="0"/>
+              <a:t>Bagging</a:t>
+            </a:r>
+          </a:p>
+          <a:p>
+            <a:pPr lvl="1"/>
+            <a:r>
+              <a:rPr lang="en-US"/>
+              <a:t>Boosting</a:t>
+            </a:r>
+            <a:endParaRPr lang="en-US" dirty="0"/>
           </a:p>
         </p:txBody>
       </p:sp>
     </p:spTree>
+    <p:extLst>
+      <p:ext uri="{BB962C8B-B14F-4D97-AF65-F5344CB8AC3E}">
+        <p14:creationId xmlns:p14="http://schemas.microsoft.com/office/powerpoint/2010/main" val="2210710025"/>
+      </p:ext>
+    </p:extLst>
+  </p:cSld>
+  <p:clrMapOvr>
+    <a:masterClrMapping/>
+  </p:clrMapOvr>
+</p:sld>
+</file>
+
+<file path=ppt/slides/slide15.xml><?xml version="1.0" encoding="utf-8"?>
+<p:sld xmlns:a="http://schemas.openxmlformats.org/drawingml/2006/main" xmlns:r="http://schemas.openxmlformats.org/officeDocument/2006/relationships" xmlns:p="http://schemas.openxmlformats.org/presentationml/2006/main">
+  <p:cSld>
+    <p:spTree>
+      <p:nvGrpSpPr>
+        <p:cNvPr id="1" name=""/>
+        <p:cNvGrpSpPr/>
+        <p:nvPr/>
+      </p:nvGrpSpPr>
+      <p:grpSpPr>
+        <a:xfrm>
+          <a:off x="0" y="0"/>
+          <a:ext cx="0" cy="0"/>
+          <a:chOff x="0" y="0"/>
+          <a:chExt cx="0" cy="0"/>
+        </a:xfrm>
+      </p:grpSpPr>
+      <p:sp>
+        <p:nvSpPr>
+          <p:cNvPr id="2" name="Title 1"/>
+          <p:cNvSpPr>
+            <a:spLocks noGrp="1"/>
+          </p:cNvSpPr>
+          <p:nvPr>
+            <p:ph type="title"/>
+          </p:nvPr>
+        </p:nvSpPr>
+        <p:spPr/>
+        <p:txBody>
+          <a:bodyPr>
+            <a:normAutofit/>
+          </a:bodyPr>
+          <a:lstStyle/>
+          <a:p>
+            <a:r>
+              <a:rPr lang="en-US" dirty="0"/>
+              <a:t>Surrogate Model – Active Learning</a:t>
+            </a:r>
+          </a:p>
+        </p:txBody>
+      </p:sp>
+      <p:sp>
+        <p:nvSpPr>
+          <p:cNvPr id="4" name="Content Placeholder 3"/>
+          <p:cNvSpPr>
+            <a:spLocks noGrp="1"/>
+          </p:cNvSpPr>
+          <p:nvPr>
+            <p:ph idx="1"/>
+          </p:nvPr>
+        </p:nvSpPr>
+        <p:spPr/>
+        <p:txBody>
+          <a:bodyPr>
+            <a:normAutofit lnSpcReduction="10000"/>
+          </a:bodyPr>
+          <a:lstStyle/>
+          <a:p>
+            <a:r>
+              <a:rPr lang="en-US" dirty="0"/>
+              <a:t>Add new samples iteratively</a:t>
+            </a:r>
+          </a:p>
+          <a:p>
+            <a:r>
+              <a:rPr lang="en-US" dirty="0"/>
+              <a:t>Focus on</a:t>
+            </a:r>
+          </a:p>
+          <a:p>
+            <a:pPr lvl="1"/>
+            <a:r>
+              <a:rPr lang="en-US" dirty="0"/>
+              <a:t>Uncertain regions</a:t>
+            </a:r>
+          </a:p>
+          <a:p>
+            <a:pPr lvl="1"/>
+            <a:r>
+              <a:rPr lang="en-US" dirty="0"/>
+              <a:t>Optimum zones</a:t>
+            </a:r>
+          </a:p>
+          <a:p>
+            <a:endParaRPr lang="en-US" dirty="0"/>
+          </a:p>
+          <a:p>
+            <a:endParaRPr lang="en-US" dirty="0"/>
+          </a:p>
+          <a:p>
+            <a:endParaRPr lang="en-US" dirty="0"/>
+          </a:p>
+          <a:p>
+            <a:pPr marL="0" indent="0">
+              <a:buNone/>
+            </a:pPr>
+            <a:r>
+              <a:rPr lang="en-US" dirty="0">
+                <a:solidFill>
+                  <a:srgbClr val="7030A0"/>
+                </a:solidFill>
+              </a:rPr>
+              <a:t>Model improves progressively</a:t>
+            </a:r>
+          </a:p>
+        </p:txBody>
+      </p:sp>
+    </p:spTree>
+    <p:extLst>
+      <p:ext uri="{BB962C8B-B14F-4D97-AF65-F5344CB8AC3E}">
+        <p14:creationId xmlns:p14="http://schemas.microsoft.com/office/powerpoint/2010/main" val="2205157761"/>
+      </p:ext>
+    </p:extLst>
+  </p:cSld>
+  <p:clrMapOvr>
+    <a:masterClrMapping/>
+  </p:clrMapOvr>
+</p:sld>
+</file>
+
+<file path=ppt/slides/slide16.xml><?xml version="1.0" encoding="utf-8"?>
+<p:sld xmlns:a="http://schemas.openxmlformats.org/drawingml/2006/main" xmlns:r="http://schemas.openxmlformats.org/officeDocument/2006/relationships" xmlns:p="http://schemas.openxmlformats.org/presentationml/2006/main">
+  <p:cSld>
+    <p:spTree>
+      <p:nvGrpSpPr>
+        <p:cNvPr id="1" name=""/>
+        <p:cNvGrpSpPr/>
+        <p:nvPr/>
+      </p:nvGrpSpPr>
+      <p:grpSpPr>
+        <a:xfrm>
+          <a:off x="0" y="0"/>
+          <a:ext cx="0" cy="0"/>
+          <a:chOff x="0" y="0"/>
+          <a:chExt cx="0" cy="0"/>
+        </a:xfrm>
+      </p:grpSpPr>
+      <p:sp>
+        <p:nvSpPr>
+          <p:cNvPr id="2" name="Title 1"/>
+          <p:cNvSpPr>
+            <a:spLocks noGrp="1"/>
+          </p:cNvSpPr>
+          <p:nvPr>
+            <p:ph type="title"/>
+          </p:nvPr>
+        </p:nvSpPr>
+        <p:spPr/>
+        <p:txBody>
+          <a:bodyPr>
+            <a:normAutofit fontScale="90000"/>
+          </a:bodyPr>
+          <a:lstStyle/>
+          <a:p>
+            <a:r>
+              <a:rPr lang="en-US" dirty="0"/>
+              <a:t>Surrogate Model – Dataset Enrichment</a:t>
+            </a:r>
+          </a:p>
+        </p:txBody>
+      </p:sp>
+      <p:sp>
+        <p:nvSpPr>
+          <p:cNvPr id="4" name="Content Placeholder 3"/>
+          <p:cNvSpPr>
+            <a:spLocks noGrp="1"/>
+          </p:cNvSpPr>
+          <p:nvPr>
+            <p:ph idx="1"/>
+          </p:nvPr>
+        </p:nvSpPr>
+        <p:spPr/>
+        <p:txBody>
+          <a:bodyPr>
+            <a:normAutofit/>
+          </a:bodyPr>
+          <a:lstStyle/>
+          <a:p>
+            <a:r>
+              <a:rPr lang="en-US" dirty="0"/>
+              <a:t>Add new simulation results</a:t>
+            </a:r>
+          </a:p>
+          <a:p>
+            <a:r>
+              <a:rPr lang="en-US" dirty="0"/>
+              <a:t>Retrain model</a:t>
+            </a:r>
+          </a:p>
+          <a:p>
+            <a:r>
+              <a:rPr lang="en-US" dirty="0"/>
+              <a:t>Repeat until</a:t>
+            </a:r>
+          </a:p>
+          <a:p>
+            <a:pPr lvl="1"/>
+            <a:r>
+              <a:rPr lang="en-US" dirty="0"/>
+              <a:t>Desired accuracy achieved</a:t>
+            </a:r>
+          </a:p>
+        </p:txBody>
+      </p:sp>
+    </p:spTree>
+    <p:extLst>
+      <p:ext uri="{BB962C8B-B14F-4D97-AF65-F5344CB8AC3E}">
+        <p14:creationId xmlns:p14="http://schemas.microsoft.com/office/powerpoint/2010/main" val="1667022875"/>
+      </p:ext>
+    </p:extLst>
+  </p:cSld>
+  <p:clrMapOvr>
+    <a:masterClrMapping/>
+  </p:clrMapOvr>
+</p:sld>
+</file>
+
+<file path=ppt/slides/slide17.xml><?xml version="1.0" encoding="utf-8"?>
+<p:sld xmlns:a="http://schemas.openxmlformats.org/drawingml/2006/main" xmlns:r="http://schemas.openxmlformats.org/officeDocument/2006/relationships" xmlns:p="http://schemas.openxmlformats.org/presentationml/2006/main">
+  <p:cSld>
+    <p:spTree>
+      <p:nvGrpSpPr>
+        <p:cNvPr id="1" name=""/>
+        <p:cNvGrpSpPr/>
+        <p:nvPr/>
+      </p:nvGrpSpPr>
+      <p:grpSpPr>
+        <a:xfrm>
+          <a:off x="0" y="0"/>
+          <a:ext cx="0" cy="0"/>
+          <a:chOff x="0" y="0"/>
+          <a:chExt cx="0" cy="0"/>
+        </a:xfrm>
+      </p:grpSpPr>
+      <p:sp>
+        <p:nvSpPr>
+          <p:cNvPr id="2" name="Title 1"/>
+          <p:cNvSpPr>
+            <a:spLocks noGrp="1"/>
+          </p:cNvSpPr>
+          <p:nvPr>
+            <p:ph type="title"/>
+          </p:nvPr>
+        </p:nvSpPr>
+        <p:spPr/>
+        <p:txBody>
+          <a:bodyPr>
+            <a:normAutofit/>
+          </a:bodyPr>
+          <a:lstStyle/>
+          <a:p>
+            <a:r>
+              <a:rPr lang="en-US" dirty="0"/>
+              <a:t>Surrogate Model – Takeaways</a:t>
+            </a:r>
+          </a:p>
+        </p:txBody>
+      </p:sp>
+      <p:sp>
+        <p:nvSpPr>
+          <p:cNvPr id="4" name="Content Placeholder 3"/>
+          <p:cNvSpPr>
+            <a:spLocks noGrp="1"/>
+          </p:cNvSpPr>
+          <p:nvPr>
+            <p:ph idx="1"/>
+          </p:nvPr>
+        </p:nvSpPr>
+        <p:spPr/>
+        <p:txBody>
+          <a:bodyPr>
+            <a:normAutofit fontScale="92500" lnSpcReduction="10000"/>
+          </a:bodyPr>
+          <a:lstStyle/>
+          <a:p>
+            <a:r>
+              <a:rPr lang="en-US" dirty="0"/>
+              <a:t>Simulations are expensive but essential</a:t>
+            </a:r>
+          </a:p>
+          <a:p>
+            <a:r>
+              <a:rPr lang="en-US" dirty="0"/>
+              <a:t>Surrogate models</a:t>
+            </a:r>
+          </a:p>
+          <a:p>
+            <a:pPr lvl="1"/>
+            <a:r>
+              <a:rPr lang="en-US" dirty="0"/>
+              <a:t>Approximate simulations</a:t>
+            </a:r>
+          </a:p>
+          <a:p>
+            <a:pPr lvl="1"/>
+            <a:r>
+              <a:rPr lang="en-US" dirty="0"/>
+              <a:t>Reduce cost drastically</a:t>
+            </a:r>
+          </a:p>
+          <a:p>
+            <a:r>
+              <a:rPr lang="en-US" dirty="0"/>
+              <a:t>Based on</a:t>
+            </a:r>
+          </a:p>
+          <a:p>
+            <a:pPr lvl="1"/>
+            <a:r>
+              <a:rPr lang="en-US" dirty="0"/>
+              <a:t>Machine learning</a:t>
+            </a:r>
+          </a:p>
+          <a:p>
+            <a:pPr lvl="1"/>
+            <a:r>
+              <a:rPr lang="en-US" dirty="0"/>
+              <a:t>Active learning</a:t>
+            </a:r>
+          </a:p>
+          <a:p>
+            <a:r>
+              <a:rPr lang="en-US" dirty="0"/>
+              <a:t>Enable</a:t>
+            </a:r>
+          </a:p>
+          <a:p>
+            <a:pPr lvl="1"/>
+            <a:r>
+              <a:rPr lang="en-US" dirty="0"/>
+              <a:t>Faster design cycles</a:t>
+            </a:r>
+          </a:p>
+        </p:txBody>
+      </p:sp>
+    </p:spTree>
+    <p:extLst>
+      <p:ext uri="{BB962C8B-B14F-4D97-AF65-F5344CB8AC3E}">
+        <p14:creationId xmlns:p14="http://schemas.microsoft.com/office/powerpoint/2010/main" val="4042477956"/>
+      </p:ext>
+    </p:extLst>
+  </p:cSld>
+  <p:clrMapOvr>
+    <a:masterClrMapping/>
+  </p:clrMapOvr>
+</p:sld>
+</file>
+
+<file path=ppt/slides/slide18.xml><?xml version="1.0" encoding="utf-8"?>
+<p:sld xmlns:a="http://schemas.openxmlformats.org/drawingml/2006/main" xmlns:r="http://schemas.openxmlformats.org/officeDocument/2006/relationships" xmlns:p="http://schemas.openxmlformats.org/presentationml/2006/main">
+  <p:cSld>
+    <p:spTree>
+      <p:nvGrpSpPr>
+        <p:cNvPr id="1" name=""/>
+        <p:cNvGrpSpPr/>
+        <p:nvPr/>
+      </p:nvGrpSpPr>
+      <p:grpSpPr>
+        <a:xfrm>
+          <a:off x="0" y="0"/>
+          <a:ext cx="0" cy="0"/>
+          <a:chOff x="0" y="0"/>
+          <a:chExt cx="0" cy="0"/>
+        </a:xfrm>
+      </p:grpSpPr>
+      <p:sp>
+        <p:nvSpPr>
+          <p:cNvPr id="2" name="Title 1"/>
+          <p:cNvSpPr>
+            <a:spLocks noGrp="1"/>
+          </p:cNvSpPr>
+          <p:nvPr>
+            <p:ph type="title"/>
+          </p:nvPr>
+        </p:nvSpPr>
+        <p:spPr/>
+        <p:txBody>
+          <a:bodyPr>
+            <a:normAutofit/>
+          </a:bodyPr>
+          <a:lstStyle/>
+          <a:p>
+            <a:r>
+              <a:rPr lang="en-US" dirty="0"/>
+              <a:t>Applications</a:t>
+            </a:r>
+          </a:p>
+        </p:txBody>
+      </p:sp>
+      <p:sp>
+        <p:nvSpPr>
+          <p:cNvPr id="4" name="Content Placeholder 3"/>
+          <p:cNvSpPr>
+            <a:spLocks noGrp="1"/>
+          </p:cNvSpPr>
+          <p:nvPr>
+            <p:ph idx="1"/>
+          </p:nvPr>
+        </p:nvSpPr>
+        <p:spPr/>
+        <p:txBody>
+          <a:bodyPr>
+            <a:normAutofit/>
+          </a:bodyPr>
+          <a:lstStyle/>
+          <a:p>
+            <a:r>
+              <a:rPr lang="en-US" dirty="0"/>
+              <a:t>Aerospace design</a:t>
+            </a:r>
+          </a:p>
+          <a:p>
+            <a:r>
+              <a:rPr lang="en-US" dirty="0"/>
+              <a:t>Automotive engineering</a:t>
+            </a:r>
+          </a:p>
+          <a:p>
+            <a:r>
+              <a:rPr lang="en-US" dirty="0"/>
+              <a:t>Product optimization</a:t>
+            </a:r>
+          </a:p>
+          <a:p>
+            <a:r>
+              <a:rPr lang="en-US" dirty="0"/>
+              <a:t>Risk analysis</a:t>
+            </a:r>
+          </a:p>
+          <a:p>
+            <a:r>
+              <a:rPr lang="en-US" dirty="0"/>
+              <a:t>Scientific computing</a:t>
+            </a:r>
+          </a:p>
+        </p:txBody>
+      </p:sp>
+    </p:spTree>
+    <p:extLst>
+      <p:ext uri="{BB962C8B-B14F-4D97-AF65-F5344CB8AC3E}">
+        <p14:creationId xmlns:p14="http://schemas.microsoft.com/office/powerpoint/2010/main" val="2285691702"/>
+      </p:ext>
+    </p:extLst>
+  </p:cSld>
+  <p:clrMapOvr>
+    <a:masterClrMapping/>
+  </p:clrMapOvr>
+</p:sld>
+</file>
+
+<file path=ppt/slides/slide19.xml><?xml version="1.0" encoding="utf-8"?>
+<p:sld xmlns:a="http://schemas.openxmlformats.org/drawingml/2006/main" xmlns:r="http://schemas.openxmlformats.org/officeDocument/2006/relationships" xmlns:p="http://schemas.openxmlformats.org/presentationml/2006/main">
+  <p:cSld>
+    <p:spTree>
+      <p:nvGrpSpPr>
+        <p:cNvPr id="1" name=""/>
+        <p:cNvGrpSpPr/>
+        <p:nvPr/>
+      </p:nvGrpSpPr>
+      <p:grpSpPr>
+        <a:xfrm>
+          <a:off x="0" y="0"/>
+          <a:ext cx="0" cy="0"/>
+          <a:chOff x="0" y="0"/>
+          <a:chExt cx="0" cy="0"/>
+        </a:xfrm>
+      </p:grpSpPr>
+      <p:sp>
+        <p:nvSpPr>
+          <p:cNvPr id="2" name="Title 1"/>
+          <p:cNvSpPr>
+            <a:spLocks noGrp="1"/>
+          </p:cNvSpPr>
+          <p:nvPr>
+            <p:ph type="title"/>
+          </p:nvPr>
+        </p:nvSpPr>
+        <p:spPr/>
+        <p:txBody>
+          <a:bodyPr>
+            <a:normAutofit/>
+          </a:bodyPr>
+          <a:lstStyle/>
+          <a:p>
+            <a:r>
+              <a:rPr lang="en-US" dirty="0"/>
+              <a:t>Conclusions</a:t>
+            </a:r>
+          </a:p>
+        </p:txBody>
+      </p:sp>
+      <p:sp>
+        <p:nvSpPr>
+          <p:cNvPr id="4" name="Content Placeholder 3"/>
+          <p:cNvSpPr>
+            <a:spLocks noGrp="1"/>
+          </p:cNvSpPr>
+          <p:nvPr>
+            <p:ph idx="1"/>
+          </p:nvPr>
+        </p:nvSpPr>
+        <p:spPr/>
+        <p:txBody>
+          <a:bodyPr>
+            <a:normAutofit/>
+          </a:bodyPr>
+          <a:lstStyle/>
+          <a:p>
+            <a:r>
+              <a:rPr lang="en-US" dirty="0"/>
+              <a:t>Surrogate modeling bridges</a:t>
+            </a:r>
+          </a:p>
+          <a:p>
+            <a:pPr lvl="1"/>
+            <a:r>
+              <a:rPr lang="en-US" dirty="0"/>
+              <a:t>Simulation and Machine Learning</a:t>
+            </a:r>
+          </a:p>
+          <a:p>
+            <a:r>
+              <a:rPr lang="en-US" dirty="0"/>
+              <a:t>Critical for</a:t>
+            </a:r>
+          </a:p>
+          <a:p>
+            <a:pPr lvl="1"/>
+            <a:r>
+              <a:rPr lang="en-US" dirty="0"/>
+              <a:t>Modern engineering design</a:t>
+            </a:r>
+          </a:p>
+          <a:p>
+            <a:pPr lvl="1"/>
+            <a:r>
+              <a:rPr lang="en-US" dirty="0"/>
+              <a:t>High performance computing problems</a:t>
+            </a:r>
+          </a:p>
+        </p:txBody>
+      </p:sp>
+    </p:spTree>
+    <p:extLst>
+      <p:ext uri="{BB962C8B-B14F-4D97-AF65-F5344CB8AC3E}">
+        <p14:creationId xmlns:p14="http://schemas.microsoft.com/office/powerpoint/2010/main" val="1922653856"/>
+      </p:ext>
+    </p:extLst>
   </p:cSld>
   <p:clrMapOvr>
     <a:masterClrMapping/>
@@ -4051,7 +4667,7 @@
         <p:spPr/>
         <p:txBody>
           <a:bodyPr>
-            <a:normAutofit/>
+            <a:normAutofit lnSpcReduction="10000"/>
           </a:bodyPr>
           <a:lstStyle/>
           <a:p>
@@ -4063,19 +4679,112 @@
           <a:p>
             <a:r>
               <a:rPr lang="en-US" dirty="0"/>
-              <a:t>Why Accelerate Simulations?</a:t>
-            </a:r>
-          </a:p>
-          <a:p>
-            <a:r>
-              <a:rPr lang="en-US" dirty="0"/>
-              <a:t>What is Surrogate Modeling?</a:t>
-            </a:r>
-          </a:p>
-          <a:p>
-            <a:r>
-              <a:rPr lang="en-US" dirty="0"/>
-              <a:t>Surrogate Model – Workflow</a:t>
+              <a:t>Computer Simulations</a:t>
+            </a:r>
+          </a:p>
+          <a:p>
+            <a:r>
+              <a:rPr lang="en-US" dirty="0"/>
+              <a:t>Surrogate Model – What?</a:t>
+            </a:r>
+          </a:p>
+          <a:p>
+            <a:r>
+              <a:rPr lang="en-US" dirty="0"/>
+              <a:t>Surrogate Model – Why?</a:t>
+            </a:r>
+          </a:p>
+          <a:p>
+            <a:r>
+              <a:rPr lang="en-US" dirty="0"/>
+              <a:t>Surrogate Model – Advantages</a:t>
+            </a:r>
+          </a:p>
+          <a:p>
+            <a:r>
+              <a:rPr lang="en-US" dirty="0"/>
+              <a:t>Surrogate Model – How?</a:t>
+            </a:r>
+          </a:p>
+          <a:p>
+            <a:r>
+              <a:rPr lang="en-US" dirty="0"/>
+              <a:t>Applications</a:t>
+            </a:r>
+          </a:p>
+          <a:p>
+            <a:r>
+              <a:rPr lang="en-US" dirty="0"/>
+              <a:t>Conclusions</a:t>
+            </a:r>
+          </a:p>
+        </p:txBody>
+      </p:sp>
+    </p:spTree>
+  </p:cSld>
+  <p:clrMapOvr>
+    <a:masterClrMapping/>
+  </p:clrMapOvr>
+</p:sld>
+</file>
+
+<file path=ppt/slides/slide20.xml><?xml version="1.0" encoding="utf-8"?>
+<p:sld xmlns:a="http://schemas.openxmlformats.org/drawingml/2006/main" xmlns:r="http://schemas.openxmlformats.org/officeDocument/2006/relationships" xmlns:p="http://schemas.openxmlformats.org/presentationml/2006/main">
+  <p:cSld>
+    <p:spTree>
+      <p:nvGrpSpPr>
+        <p:cNvPr id="1" name=""/>
+        <p:cNvGrpSpPr/>
+        <p:nvPr/>
+      </p:nvGrpSpPr>
+      <p:grpSpPr>
+        <a:xfrm>
+          <a:off x="0" y="0"/>
+          <a:ext cx="0" cy="0"/>
+          <a:chOff x="0" y="0"/>
+          <a:chExt cx="0" cy="0"/>
+        </a:xfrm>
+      </p:grpSpPr>
+      <p:sp>
+        <p:nvSpPr>
+          <p:cNvPr id="2" name="Title 1"/>
+          <p:cNvSpPr>
+            <a:spLocks noGrp="1"/>
+          </p:cNvSpPr>
+          <p:nvPr>
+            <p:ph type="ctrTitle"/>
+          </p:nvPr>
+        </p:nvSpPr>
+        <p:spPr/>
+        <p:txBody>
+          <a:bodyPr/>
+          <a:lstStyle/>
+          <a:p>
+            <a:r>
+              <a:rPr lang="en-US" dirty="0"/>
+              <a:t>Questions?</a:t>
+            </a:r>
+          </a:p>
+        </p:txBody>
+      </p:sp>
+      <p:sp>
+        <p:nvSpPr>
+          <p:cNvPr id="3" name="Subtitle 2"/>
+          <p:cNvSpPr>
+            <a:spLocks noGrp="1"/>
+          </p:cNvSpPr>
+          <p:nvPr>
+            <p:ph type="subTitle" idx="1"/>
+          </p:nvPr>
+        </p:nvSpPr>
+        <p:spPr/>
+        <p:txBody>
+          <a:bodyPr/>
+          <a:lstStyle/>
+          <a:p>
+            <a:r>
+              <a:rPr lang="en-US" dirty="0"/>
+              <a:t>Thank you</a:t>
             </a:r>
           </a:p>
         </p:txBody>
@@ -4265,7 +4974,7 @@
           <a:p>
             <a:r>
               <a:rPr lang="en-US" dirty="0"/>
-              <a:t>Why Accelerate Simulations?</a:t>
+              <a:t>Computer Simulations</a:t>
             </a:r>
           </a:p>
         </p:txBody>
@@ -4283,7 +4992,7 @@
         <p:spPr/>
         <p:txBody>
           <a:bodyPr>
-            <a:normAutofit fontScale="85000" lnSpcReduction="20000"/>
+            <a:normAutofit lnSpcReduction="10000"/>
           </a:bodyPr>
           <a:lstStyle/>
           <a:p>
@@ -4320,24 +5029,10 @@
             </a:r>
           </a:p>
           <a:p>
-            <a:r>
-              <a:rPr lang="en-US" dirty="0"/>
-              <a:t>Simulation runs  are often</a:t>
-            </a:r>
-          </a:p>
-          <a:p>
-            <a:pPr lvl="1"/>
-            <a:r>
-              <a:rPr lang="en-US" dirty="0"/>
-              <a:t>Expensive</a:t>
-            </a:r>
-          </a:p>
-          <a:p>
-            <a:pPr lvl="1"/>
-            <a:r>
-              <a:rPr lang="en-US" dirty="0"/>
-              <a:t>Takes days per run</a:t>
-            </a:r>
+            <a:pPr marL="0" indent="0">
+              <a:buNone/>
+            </a:pPr>
+            <a:endParaRPr lang="en-US" dirty="0"/>
           </a:p>
           <a:p>
             <a:endParaRPr lang="en-US" dirty="0"/>
@@ -4352,7 +5047,7 @@
                   <a:srgbClr val="7030A0"/>
                 </a:solidFill>
               </a:rPr>
-              <a:t>Simulations are accurate but costly and impractical at scale.</a:t>
+              <a:t>Computer simulations are accurate.</a:t>
             </a:r>
           </a:p>
         </p:txBody>
@@ -4406,7 +5101,7 @@
           <a:p>
             <a:r>
               <a:rPr lang="en-US" dirty="0"/>
-              <a:t>What is Surrogate Modeling?</a:t>
+              <a:t>Surrogate Model - What?</a:t>
             </a:r>
           </a:p>
         </p:txBody>
@@ -4529,7 +5224,7 @@
           <a:p>
             <a:r>
               <a:rPr lang="en-US" dirty="0"/>
-              <a:t>Surrogate Model – Key Idea</a:t>
+              <a:t>Surrogate Model - Why?</a:t>
             </a:r>
           </a:p>
         </p:txBody>
@@ -4547,25 +5242,27 @@
         <p:spPr/>
         <p:txBody>
           <a:bodyPr>
-            <a:normAutofit lnSpcReduction="10000"/>
+            <a:normAutofit/>
           </a:bodyPr>
           <a:lstStyle/>
           <a:p>
             <a:r>
               <a:rPr lang="en-US" dirty="0"/>
-              <a:t>Run a few simulations</a:t>
-            </a:r>
-          </a:p>
-          <a:p>
-            <a:r>
-              <a:rPr lang="en-US" dirty="0"/>
-              <a:t>Train a statistical or machine learning model</a:t>
-            </a:r>
-          </a:p>
-          <a:p>
-            <a:r>
-              <a:rPr lang="en-US" dirty="0"/>
-              <a:t>Use model for predictions</a:t>
+              <a:t>Simulation runs  are often</a:t>
+            </a:r>
+          </a:p>
+          <a:p>
+            <a:pPr lvl="1"/>
+            <a:r>
+              <a:rPr lang="en-US" dirty="0"/>
+              <a:t>Expensive</a:t>
+            </a:r>
+          </a:p>
+          <a:p>
+            <a:pPr lvl="1"/>
+            <a:r>
+              <a:rPr lang="en-US" dirty="0"/>
+              <a:t>Takes days per run</a:t>
             </a:r>
           </a:p>
           <a:p>
@@ -4575,14 +5272,7 @@
             <a:endParaRPr lang="en-US" dirty="0"/>
           </a:p>
           <a:p>
-            <a:pPr marL="0" indent="0">
-              <a:buNone/>
-            </a:pPr>
-            <a:endParaRPr lang="en-US" dirty="0">
-              <a:solidFill>
-                <a:srgbClr val="7030A0"/>
-              </a:solidFill>
-            </a:endParaRPr>
+            <a:endParaRPr lang="en-US" dirty="0"/>
           </a:p>
           <a:p>
             <a:pPr marL="0" indent="0">
@@ -4594,16 +5284,15 @@
                   <a:srgbClr val="7030A0"/>
                 </a:solidFill>
               </a:rPr>
-              <a:t>Surrogate model approximates simulation output and replaces it.</a:t>
-            </a:r>
-            <a:endParaRPr lang="en-US" dirty="0"/>
+              <a:t>Computer simulations are costly and impractical at scale.</a:t>
+            </a:r>
           </a:p>
         </p:txBody>
       </p:sp>
     </p:spTree>
     <p:extLst>
       <p:ext uri="{BB962C8B-B14F-4D97-AF65-F5344CB8AC3E}">
-        <p14:creationId xmlns:p14="http://schemas.microsoft.com/office/powerpoint/2010/main" val="3636901660"/>
+        <p14:creationId xmlns:p14="http://schemas.microsoft.com/office/powerpoint/2010/main" val="913340888"/>
       </p:ext>
     </p:extLst>
   </p:cSld>
@@ -4649,7 +5338,7 @@
           <a:p>
             <a:r>
               <a:rPr lang="en-US" dirty="0"/>
-              <a:t>Surrogate Model – Concept</a:t>
+              <a:t>Surrogate Model – Advantages</a:t>
             </a:r>
           </a:p>
         </p:txBody>
@@ -4667,88 +5356,45 @@
         <p:spPr/>
         <p:txBody>
           <a:bodyPr>
-            <a:normAutofit fontScale="92500" lnSpcReduction="20000"/>
+            <a:normAutofit/>
           </a:bodyPr>
           <a:lstStyle/>
           <a:p>
             <a:r>
               <a:rPr lang="en-US" dirty="0"/>
-              <a:t>Inputs </a:t>
-            </a:r>
-          </a:p>
-          <a:p>
-            <a:pPr lvl="1"/>
-            <a:r>
-              <a:rPr lang="en-US" dirty="0"/>
-              <a:t>Design parameters (X</a:t>
-            </a:r>
-            <a:r>
-              <a:rPr lang="en-US" baseline="-25000" dirty="0"/>
-              <a:t>1</a:t>
-            </a:r>
-            <a:r>
-              <a:rPr lang="en-US" dirty="0"/>
-              <a:t>, X</a:t>
-            </a:r>
-            <a:r>
-              <a:rPr lang="en-US" baseline="-25000" dirty="0"/>
-              <a:t>2</a:t>
-            </a:r>
-            <a:r>
-              <a:rPr lang="en-US" dirty="0"/>
-              <a:t>, …, X</a:t>
-            </a:r>
-            <a:r>
-              <a:rPr lang="en-US" baseline="-25000" dirty="0"/>
-              <a:t>n</a:t>
-            </a:r>
-            <a:r>
-              <a:rPr lang="en-US" dirty="0"/>
-              <a:t>)</a:t>
-            </a:r>
-          </a:p>
-          <a:p>
-            <a:r>
-              <a:rPr lang="en-US" dirty="0"/>
-              <a:t>Simulation </a:t>
-            </a:r>
-          </a:p>
-          <a:p>
-            <a:pPr lvl="1"/>
-            <a:r>
-              <a:rPr lang="en-US" dirty="0"/>
-              <a:t>Expensive  </a:t>
-            </a:r>
-          </a:p>
-          <a:p>
-            <a:pPr lvl="1"/>
-            <a:r>
-              <a:rPr lang="en-US" dirty="0"/>
-              <a:t>f(X) = y</a:t>
-            </a:r>
-          </a:p>
-          <a:p>
-            <a:r>
-              <a:rPr lang="en-US" dirty="0"/>
-              <a:t>Surrogate</a:t>
-            </a:r>
-          </a:p>
-          <a:p>
-            <a:pPr lvl="1"/>
-            <a:r>
-              <a:rPr lang="en-US" dirty="0"/>
-              <a:t>Learned model </a:t>
-            </a:r>
-          </a:p>
-          <a:p>
-            <a:pPr lvl="1"/>
-            <a:r>
-              <a:rPr lang="en-US" dirty="0"/>
-              <a:t>f'(X) ≈ y</a:t>
+              <a:t>Huge reduction in computation time</a:t>
+            </a:r>
+          </a:p>
+          <a:p>
+            <a:r>
+              <a:rPr lang="en-US" dirty="0"/>
+              <a:t>Real time analysis</a:t>
+            </a:r>
+          </a:p>
+          <a:p>
+            <a:r>
+              <a:rPr lang="en-US" dirty="0"/>
+              <a:t>Large scale optimization</a:t>
+            </a:r>
+          </a:p>
+          <a:p>
+            <a:r>
+              <a:rPr lang="en-US" dirty="0"/>
+              <a:t>Makes expensive tasks affordable</a:t>
             </a:r>
           </a:p>
           <a:p>
             <a:endParaRPr lang="en-US" dirty="0"/>
+          </a:p>
+          <a:p>
+            <a:pPr marL="0" indent="0">
+              <a:buNone/>
+            </a:pPr>
+            <a:endParaRPr lang="en-US" dirty="0">
+              <a:solidFill>
+                <a:srgbClr val="7030A0"/>
+              </a:solidFill>
+            </a:endParaRPr>
           </a:p>
           <a:p>
             <a:pPr marL="0" indent="0">
@@ -4760,10 +5406,8 @@
                   <a:srgbClr val="7030A0"/>
                 </a:solidFill>
               </a:rPr>
-              <a:t>Surrogate model is faster, cheaper, and scalable.</a:t>
-            </a:r>
-          </a:p>
-          <a:p>
+              <a:t>Thousands of evaluations become feasible.</a:t>
+            </a:r>
             <a:endParaRPr lang="en-US" dirty="0"/>
           </a:p>
         </p:txBody>
@@ -4771,7 +5415,7 @@
     </p:spTree>
     <p:extLst>
       <p:ext uri="{BB962C8B-B14F-4D97-AF65-F5344CB8AC3E}">
-        <p14:creationId xmlns:p14="http://schemas.microsoft.com/office/powerpoint/2010/main" val="3898719603"/>
+        <p14:creationId xmlns:p14="http://schemas.microsoft.com/office/powerpoint/2010/main" val="3738389185"/>
       </p:ext>
     </p:extLst>
   </p:cSld>
@@ -4817,7 +5461,7 @@
           <a:p>
             <a:r>
               <a:rPr lang="en-US" dirty="0"/>
-              <a:t>Surrogate Model – Benefits</a:t>
+              <a:t>Surrogate Model – How?</a:t>
             </a:r>
           </a:p>
         </p:txBody>
@@ -4835,41 +5479,38 @@
         <p:spPr/>
         <p:txBody>
           <a:bodyPr>
-            <a:normAutofit/>
+            <a:normAutofit lnSpcReduction="10000"/>
           </a:bodyPr>
           <a:lstStyle/>
           <a:p>
             <a:r>
               <a:rPr lang="en-US" dirty="0"/>
-              <a:t>Huge reduction in computation time</a:t>
-            </a:r>
-          </a:p>
-          <a:p>
-            <a:r>
-              <a:rPr lang="en-US" dirty="0"/>
-              <a:t>Real time analysis</a:t>
-            </a:r>
-          </a:p>
-          <a:p>
-            <a:r>
-              <a:rPr lang="en-US" dirty="0"/>
-              <a:t>Large scale optimization</a:t>
-            </a:r>
-          </a:p>
-          <a:p>
-            <a:r>
-              <a:rPr lang="en-US" dirty="0"/>
-              <a:t>Makes expensive tasks affordable</a:t>
+              <a:t>Run a few simulations</a:t>
+            </a:r>
+          </a:p>
+          <a:p>
+            <a:r>
+              <a:rPr lang="en-US" dirty="0"/>
+              <a:t>Train a statistical or machine learning model</a:t>
+            </a:r>
+          </a:p>
+          <a:p>
+            <a:r>
+              <a:rPr lang="en-US" dirty="0"/>
+              <a:t>Use model for predictions</a:t>
             </a:r>
           </a:p>
           <a:p>
             <a:endParaRPr lang="en-US" dirty="0"/>
           </a:p>
           <a:p>
+            <a:endParaRPr lang="en-US" dirty="0"/>
+          </a:p>
+          <a:p>
             <a:pPr marL="0" indent="0">
               <a:buNone/>
             </a:pPr>
-            <a:endParaRPr lang="en-US">
+            <a:endParaRPr lang="en-US" dirty="0">
               <a:solidFill>
                 <a:srgbClr val="7030A0"/>
               </a:solidFill>
@@ -4879,21 +5520,13 @@
             <a:pPr marL="0" indent="0">
               <a:buNone/>
             </a:pPr>
-            <a:r>
-              <a:rPr lang="en-US">
-                <a:solidFill>
-                  <a:srgbClr val="7030A0"/>
-                </a:solidFill>
-              </a:rPr>
-              <a:t>Thousands </a:t>
-            </a:r>
             <a:r>
               <a:rPr lang="en-US" dirty="0">
                 <a:solidFill>
                   <a:srgbClr val="7030A0"/>
                 </a:solidFill>
               </a:rPr>
-              <a:t>of evaluations become feasible.</a:t>
+              <a:t>Surrogate model approximates simulation output and replaces it.</a:t>
             </a:r>
             <a:endParaRPr lang="en-US" dirty="0"/>
           </a:p>
@@ -4902,7 +5535,7 @@
     </p:spTree>
     <p:extLst>
       <p:ext uri="{BB962C8B-B14F-4D97-AF65-F5344CB8AC3E}">
-        <p14:creationId xmlns:p14="http://schemas.microsoft.com/office/powerpoint/2010/main" val="1531748995"/>
+        <p14:creationId xmlns:p14="http://schemas.microsoft.com/office/powerpoint/2010/main" val="3636901660"/>
       </p:ext>
     </p:extLst>
   </p:cSld>
@@ -4948,7 +5581,7 @@
           <a:p>
             <a:r>
               <a:rPr lang="en-US" dirty="0"/>
-              <a:t>Surrogate Model – Characteristics</a:t>
+              <a:t>Surrogate Model – How?</a:t>
             </a:r>
           </a:p>
         </p:txBody>
@@ -4966,59 +5599,103 @@
         <p:spPr/>
         <p:txBody>
           <a:bodyPr>
-            <a:normAutofit/>
+            <a:normAutofit fontScale="92500" lnSpcReduction="20000"/>
           </a:bodyPr>
           <a:lstStyle/>
           <a:p>
             <a:r>
               <a:rPr lang="en-US" dirty="0"/>
-              <a:t>Surrogate model</a:t>
+              <a:t>Inputs </a:t>
             </a:r>
           </a:p>
           <a:p>
             <a:pPr lvl="1"/>
             <a:r>
               <a:rPr lang="en-US" dirty="0"/>
-              <a:t>Metamodel</a:t>
+              <a:t>Design parameters (X</a:t>
+            </a:r>
+            <a:r>
+              <a:rPr lang="en-US" baseline="-25000" dirty="0"/>
+              <a:t>1</a:t>
+            </a:r>
+            <a:r>
+              <a:rPr lang="en-US" dirty="0"/>
+              <a:t>, X</a:t>
+            </a:r>
+            <a:r>
+              <a:rPr lang="en-US" baseline="-25000" dirty="0"/>
+              <a:t>2</a:t>
+            </a:r>
+            <a:r>
+              <a:rPr lang="en-US" dirty="0"/>
+              <a:t>, …, X</a:t>
+            </a:r>
+            <a:r>
+              <a:rPr lang="en-US" baseline="-25000" dirty="0"/>
+              <a:t>n</a:t>
+            </a:r>
+            <a:r>
+              <a:rPr lang="en-US" dirty="0"/>
+              <a:t>)</a:t>
+            </a:r>
+          </a:p>
+          <a:p>
+            <a:r>
+              <a:rPr lang="en-US" dirty="0"/>
+              <a:t>Simulation </a:t>
             </a:r>
           </a:p>
           <a:p>
             <a:pPr lvl="1"/>
             <a:r>
               <a:rPr lang="en-US" dirty="0"/>
-              <a:t>Emulator</a:t>
-            </a:r>
-          </a:p>
-          <a:p>
-            <a:r>
-              <a:rPr lang="en-US" dirty="0"/>
-              <a:t>Built using sampled data</a:t>
-            </a:r>
-          </a:p>
-          <a:p>
-            <a:r>
-              <a:rPr lang="en-US" dirty="0"/>
-              <a:t>Requires:</a:t>
+              <a:t>Expensive  </a:t>
             </a:r>
           </a:p>
           <a:p>
             <a:pPr lvl="1"/>
             <a:r>
               <a:rPr lang="en-US" dirty="0"/>
-              <a:t>Careful data collection</a:t>
+              <a:t>f(X) = y</a:t>
+            </a:r>
+          </a:p>
+          <a:p>
+            <a:r>
+              <a:rPr lang="en-US" dirty="0"/>
+              <a:t>Surrogate</a:t>
             </a:r>
           </a:p>
           <a:p>
             <a:pPr lvl="1"/>
             <a:r>
               <a:rPr lang="en-US" dirty="0"/>
-              <a:t>Model validation</a:t>
-            </a:r>
+              <a:t>Learned model </a:t>
+            </a:r>
+          </a:p>
+          <a:p>
+            <a:pPr lvl="1"/>
+            <a:r>
+              <a:rPr lang="en-US" dirty="0"/>
+              <a:t>f'(X) ≈ y</a:t>
+            </a:r>
+          </a:p>
+          <a:p>
+            <a:endParaRPr lang="en-US" dirty="0"/>
           </a:p>
           <a:p>
             <a:pPr marL="0" indent="0">
               <a:buNone/>
             </a:pPr>
+            <a:r>
+              <a:rPr lang="en-US" dirty="0">
+                <a:solidFill>
+                  <a:srgbClr val="7030A0"/>
+                </a:solidFill>
+              </a:rPr>
+              <a:t>Surrogate model is faster, cheaper, and scalable.</a:t>
+            </a:r>
+          </a:p>
+          <a:p>
             <a:endParaRPr lang="en-US" dirty="0"/>
           </a:p>
         </p:txBody>
@@ -5026,7 +5703,7 @@
     </p:spTree>
     <p:extLst>
       <p:ext uri="{BB962C8B-B14F-4D97-AF65-F5344CB8AC3E}">
-        <p14:creationId xmlns:p14="http://schemas.microsoft.com/office/powerpoint/2010/main" val="1167000598"/>
+        <p14:creationId xmlns:p14="http://schemas.microsoft.com/office/powerpoint/2010/main" val="3898719603"/>
       </p:ext>
     </p:extLst>
   </p:cSld>

--- a/Presentations/SurrogateModel.pptx
+++ b/Presentations/SurrogateModel.pptx
@@ -5,7 +5,7 @@
     <p:sldMasterId id="2147483648" r:id="rId1"/>
   </p:sldMasterIdLst>
   <p:notesMasterIdLst>
-    <p:notesMasterId r:id="rId22"/>
+    <p:notesMasterId r:id="rId23"/>
   </p:notesMasterIdLst>
   <p:sldIdLst>
     <p:sldId id="256" r:id="rId2"/>
@@ -19,15 +19,16 @@
     <p:sldId id="281" r:id="rId10"/>
     <p:sldId id="283" r:id="rId11"/>
     <p:sldId id="284" r:id="rId12"/>
-    <p:sldId id="285" r:id="rId13"/>
-    <p:sldId id="286" r:id="rId14"/>
-    <p:sldId id="287" r:id="rId15"/>
-    <p:sldId id="288" r:id="rId16"/>
-    <p:sldId id="289" r:id="rId17"/>
-    <p:sldId id="290" r:id="rId18"/>
-    <p:sldId id="291" r:id="rId19"/>
-    <p:sldId id="292" r:id="rId20"/>
-    <p:sldId id="269" r:id="rId21"/>
+    <p:sldId id="294" r:id="rId13"/>
+    <p:sldId id="285" r:id="rId14"/>
+    <p:sldId id="286" r:id="rId15"/>
+    <p:sldId id="287" r:id="rId16"/>
+    <p:sldId id="288" r:id="rId17"/>
+    <p:sldId id="289" r:id="rId18"/>
+    <p:sldId id="290" r:id="rId19"/>
+    <p:sldId id="291" r:id="rId20"/>
+    <p:sldId id="292" r:id="rId21"/>
+    <p:sldId id="269" r:id="rId22"/>
   </p:sldIdLst>
   <p:sldSz cx="9144000" cy="6858000" type="screen4x3"/>
   <p:notesSz cx="6858000" cy="9144000"/>
@@ -3758,77 +3759,120 @@
           <a:p>
             <a:r>
               <a:rPr lang="en-US" dirty="0"/>
-              <a:t>Surrogate Model – Sampling</a:t>
-            </a:r>
-          </a:p>
-        </p:txBody>
-      </p:sp>
-      <p:sp>
-        <p:nvSpPr>
-          <p:cNvPr id="4" name="Content Placeholder 3"/>
-          <p:cNvSpPr>
-            <a:spLocks noGrp="1"/>
-          </p:cNvSpPr>
-          <p:nvPr>
-            <p:ph idx="1"/>
-          </p:nvPr>
-        </p:nvSpPr>
-        <p:spPr/>
-        <p:txBody>
-          <a:bodyPr>
-            <a:normAutofit/>
+              <a:t>Surrogate Model – How?</a:t>
+            </a:r>
+          </a:p>
+        </p:txBody>
+      </p:sp>
+      <p:pic>
+        <p:nvPicPr>
+          <p:cNvPr id="7" name="Picture 6">
+            <a:extLst>
+              <a:ext uri="{FF2B5EF4-FFF2-40B4-BE49-F238E27FC236}">
+                <a16:creationId xmlns:a16="http://schemas.microsoft.com/office/drawing/2014/main" id="{16B0715C-35E3-99BD-BA22-BB2A7D476368}"/>
+              </a:ext>
+            </a:extLst>
+          </p:cNvPr>
+          <p:cNvPicPr>
+            <a:picLocks noChangeAspect="1"/>
+          </p:cNvPicPr>
+          <p:nvPr/>
+        </p:nvPicPr>
+        <p:blipFill>
+          <a:blip r:embed="rId2">
+            <a:extLst>
+              <a:ext uri="{28A0092B-C50C-407E-A947-70E740481C1C}">
+                <a14:useLocalDpi xmlns:a14="http://schemas.microsoft.com/office/drawing/2010/main" val="0"/>
+              </a:ext>
+            </a:extLst>
+          </a:blip>
+          <a:stretch>
+            <a:fillRect/>
+          </a:stretch>
+        </p:blipFill>
+        <p:spPr>
+          <a:xfrm>
+            <a:off x="2216944" y="1676400"/>
+            <a:ext cx="4710112" cy="4498061"/>
+          </a:xfrm>
+          <a:prstGeom prst="rect">
+            <a:avLst/>
+          </a:prstGeom>
+        </p:spPr>
+      </p:pic>
+      <p:sp>
+        <p:nvSpPr>
+          <p:cNvPr id="8" name="Text Box 10">
+            <a:extLst>
+              <a:ext uri="{FF2B5EF4-FFF2-40B4-BE49-F238E27FC236}">
+                <a16:creationId xmlns:a16="http://schemas.microsoft.com/office/drawing/2014/main" id="{3DACA9D7-C988-5915-2951-F002D0765565}"/>
+              </a:ext>
+            </a:extLst>
+          </p:cNvPr>
+          <p:cNvSpPr txBox="1">
+            <a:spLocks noChangeArrowheads="1"/>
+          </p:cNvSpPr>
+          <p:nvPr/>
+        </p:nvSpPr>
+        <p:spPr bwMode="auto">
+          <a:xfrm rot="10800000" flipV="1">
+            <a:off x="0" y="6519446"/>
+            <a:ext cx="1828800" cy="338554"/>
+          </a:xfrm>
+          <a:prstGeom prst="rect">
+            <a:avLst/>
+          </a:prstGeom>
+          <a:noFill/>
+          <a:ln w="9525">
+            <a:noFill/>
+            <a:miter lim="800000"/>
+            <a:headEnd/>
+            <a:tailEnd/>
+          </a:ln>
+          <a:effectLst/>
+        </p:spPr>
+        <p:txBody>
+          <a:bodyPr wrap="square">
+            <a:spAutoFit/>
           </a:bodyPr>
           <a:lstStyle/>
           <a:p>
-            <a:r>
-              <a:rPr lang="en-US" dirty="0"/>
-              <a:t>Select input points carefully</a:t>
-            </a:r>
-          </a:p>
-          <a:p>
-            <a:r>
-              <a:rPr lang="en-US" dirty="0"/>
-              <a:t>Goal</a:t>
-            </a:r>
-          </a:p>
-          <a:p>
-            <a:pPr lvl="1"/>
-            <a:r>
-              <a:rPr lang="en-US" dirty="0"/>
-              <a:t>Cover entire parameter space</a:t>
-            </a:r>
-          </a:p>
-          <a:p>
-            <a:r>
-              <a:rPr lang="en-US" dirty="0"/>
-              <a:t>Technique</a:t>
-            </a:r>
-          </a:p>
-          <a:p>
-            <a:pPr lvl="1"/>
-            <a:r>
-              <a:rPr lang="en-US" dirty="0"/>
-              <a:t>Latin Hypercube Sampling</a:t>
-            </a:r>
-          </a:p>
-          <a:p>
-            <a:r>
-              <a:rPr lang="en-US" dirty="0"/>
-              <a:t>Ensure representative dataset</a:t>
-            </a:r>
-          </a:p>
-          <a:p>
-            <a:pPr marL="0" indent="0">
-              <a:buNone/>
+            <a:pPr>
+              <a:spcBef>
+                <a:spcPct val="50000"/>
+              </a:spcBef>
             </a:pPr>
-            <a:endParaRPr lang="en-US" dirty="0"/>
+            <a:r>
+              <a:rPr lang="en-US" sz="1600" b="1" dirty="0">
+                <a:solidFill>
+                  <a:srgbClr val="FF0000"/>
+                </a:solidFill>
+              </a:rPr>
+              <a:t>Image </a:t>
+            </a:r>
+            <a:r>
+              <a:rPr lang="en-US" sz="1600" b="1" dirty="0" err="1">
+                <a:solidFill>
+                  <a:srgbClr val="FF0000"/>
+                </a:solidFill>
+              </a:rPr>
+              <a:t>ack</a:t>
+            </a:r>
+            <a:r>
+              <a:rPr lang="en-US" sz="1600" b="1" dirty="0">
+                <a:solidFill>
+                  <a:srgbClr val="FF0000"/>
+                </a:solidFill>
+              </a:rPr>
+              <a:t> – Google</a:t>
+            </a:r>
           </a:p>
         </p:txBody>
       </p:sp>
     </p:spTree>
     <p:extLst>
       <p:ext uri="{BB962C8B-B14F-4D97-AF65-F5344CB8AC3E}">
-        <p14:creationId xmlns:p14="http://schemas.microsoft.com/office/powerpoint/2010/main" val="2594846989"/>
+        <p14:creationId xmlns:p14="http://schemas.microsoft.com/office/powerpoint/2010/main" val="72718347"/>
       </p:ext>
     </p:extLst>
   </p:cSld>
@@ -3874,7 +3918,7 @@
           <a:p>
             <a:r>
               <a:rPr lang="en-US" dirty="0"/>
-              <a:t>Surrogate Model – Simulations</a:t>
+              <a:t>Surrogate Model – Sampling</a:t>
             </a:r>
           </a:p>
         </p:txBody>
@@ -3898,26 +3942,26 @@
           <a:p>
             <a:r>
               <a:rPr lang="en-US" dirty="0"/>
-              <a:t>Run simulations for selected inputs</a:t>
-            </a:r>
-          </a:p>
-          <a:p>
-            <a:r>
-              <a:rPr lang="en-US" dirty="0"/>
-              <a:t>Collect</a:t>
+              <a:t>Select input points carefully</a:t>
+            </a:r>
+          </a:p>
+          <a:p>
+            <a:r>
+              <a:rPr lang="en-US" dirty="0"/>
+              <a:t>Goal</a:t>
             </a:r>
           </a:p>
           <a:p>
             <a:pPr lvl="1"/>
             <a:r>
               <a:rPr lang="en-US" dirty="0"/>
-              <a:t>Input and Output pairs (X, y)</a:t>
-            </a:r>
-          </a:p>
-          <a:p>
-            <a:r>
-              <a:rPr lang="en-US" dirty="0"/>
-              <a:t>Simulation dataset</a:t>
+              <a:t>Cover entire parameter space</a:t>
+            </a:r>
+          </a:p>
+          <a:p>
+            <a:r>
+              <a:rPr lang="en-US" dirty="0"/>
+              <a:t>Ensure representative dataset</a:t>
             </a:r>
           </a:p>
           <a:p>
@@ -3931,7 +3975,7 @@
     </p:spTree>
     <p:extLst>
       <p:ext uri="{BB962C8B-B14F-4D97-AF65-F5344CB8AC3E}">
-        <p14:creationId xmlns:p14="http://schemas.microsoft.com/office/powerpoint/2010/main" val="831949061"/>
+        <p14:creationId xmlns:p14="http://schemas.microsoft.com/office/powerpoint/2010/main" val="2594846989"/>
       </p:ext>
     </p:extLst>
   </p:cSld>
@@ -3971,13 +4015,13 @@
         <p:spPr/>
         <p:txBody>
           <a:bodyPr>
-            <a:normAutofit fontScale="90000"/>
+            <a:normAutofit/>
           </a:bodyPr>
           <a:lstStyle/>
           <a:p>
             <a:r>
               <a:rPr lang="en-US" dirty="0"/>
-              <a:t>Surrogate Model – Model Construction</a:t>
+              <a:t>Surrogate Model – Simulations</a:t>
             </a:r>
           </a:p>
         </p:txBody>
@@ -4001,48 +4045,32 @@
           <a:p>
             <a:r>
               <a:rPr lang="en-US" dirty="0"/>
-              <a:t>Train Machine Learning model on dataset</a:t>
-            </a:r>
-          </a:p>
-          <a:p>
-            <a:r>
-              <a:rPr lang="en-US" dirty="0"/>
-              <a:t>Use</a:t>
+              <a:t>Run simulations for selected inputs</a:t>
+            </a:r>
+          </a:p>
+          <a:p>
+            <a:r>
+              <a:rPr lang="en-US" dirty="0"/>
+              <a:t>Collect</a:t>
             </a:r>
           </a:p>
           <a:p>
             <a:pPr lvl="1"/>
             <a:r>
               <a:rPr lang="en-US" dirty="0"/>
-              <a:t>Validation</a:t>
-            </a:r>
-          </a:p>
-          <a:p>
-            <a:pPr lvl="1"/>
-            <a:r>
-              <a:rPr lang="en-US" dirty="0"/>
-              <a:t>Model selection</a:t>
-            </a:r>
-          </a:p>
-          <a:p>
-            <a:r>
-              <a:rPr lang="en-US" dirty="0"/>
-              <a:t>Improve using</a:t>
-            </a:r>
-          </a:p>
-          <a:p>
-            <a:pPr lvl="1"/>
-            <a:r>
-              <a:rPr lang="en-US" dirty="0"/>
-              <a:t>Bagging</a:t>
-            </a:r>
-          </a:p>
-          <a:p>
-            <a:pPr lvl="1"/>
-            <a:r>
-              <a:rPr lang="en-US"/>
-              <a:t>Boosting</a:t>
-            </a:r>
+              <a:t>Input and Output pairs (X, y)</a:t>
+            </a:r>
+          </a:p>
+          <a:p>
+            <a:r>
+              <a:rPr lang="en-US" dirty="0"/>
+              <a:t>Simulation dataset</a:t>
+            </a:r>
+          </a:p>
+          <a:p>
+            <a:pPr marL="0" indent="0">
+              <a:buNone/>
+            </a:pPr>
             <a:endParaRPr lang="en-US" dirty="0"/>
           </a:p>
         </p:txBody>
@@ -4050,7 +4078,7 @@
     </p:spTree>
     <p:extLst>
       <p:ext uri="{BB962C8B-B14F-4D97-AF65-F5344CB8AC3E}">
-        <p14:creationId xmlns:p14="http://schemas.microsoft.com/office/powerpoint/2010/main" val="2210710025"/>
+        <p14:creationId xmlns:p14="http://schemas.microsoft.com/office/powerpoint/2010/main" val="831949061"/>
       </p:ext>
     </p:extLst>
   </p:cSld>
@@ -4090,87 +4118,86 @@
         <p:spPr/>
         <p:txBody>
           <a:bodyPr>
+            <a:normAutofit fontScale="90000"/>
+          </a:bodyPr>
+          <a:lstStyle/>
+          <a:p>
+            <a:r>
+              <a:rPr lang="en-US" dirty="0"/>
+              <a:t>Surrogate Model – Model Construction</a:t>
+            </a:r>
+          </a:p>
+        </p:txBody>
+      </p:sp>
+      <p:sp>
+        <p:nvSpPr>
+          <p:cNvPr id="4" name="Content Placeholder 3"/>
+          <p:cNvSpPr>
+            <a:spLocks noGrp="1"/>
+          </p:cNvSpPr>
+          <p:nvPr>
+            <p:ph idx="1"/>
+          </p:nvPr>
+        </p:nvSpPr>
+        <p:spPr/>
+        <p:txBody>
+          <a:bodyPr>
             <a:normAutofit/>
           </a:bodyPr>
           <a:lstStyle/>
           <a:p>
             <a:r>
               <a:rPr lang="en-US" dirty="0"/>
-              <a:t>Surrogate Model – Active Learning</a:t>
-            </a:r>
-          </a:p>
-        </p:txBody>
-      </p:sp>
-      <p:sp>
-        <p:nvSpPr>
-          <p:cNvPr id="4" name="Content Placeholder 3"/>
-          <p:cNvSpPr>
-            <a:spLocks noGrp="1"/>
-          </p:cNvSpPr>
-          <p:nvPr>
-            <p:ph idx="1"/>
-          </p:nvPr>
-        </p:nvSpPr>
-        <p:spPr/>
-        <p:txBody>
-          <a:bodyPr>
-            <a:normAutofit lnSpcReduction="10000"/>
-          </a:bodyPr>
-          <a:lstStyle/>
-          <a:p>
-            <a:r>
-              <a:rPr lang="en-US" dirty="0"/>
-              <a:t>Add new samples iteratively</a:t>
-            </a:r>
-          </a:p>
-          <a:p>
-            <a:r>
-              <a:rPr lang="en-US" dirty="0"/>
-              <a:t>Focus on</a:t>
+              <a:t>Train Machine Learning model on dataset</a:t>
+            </a:r>
+          </a:p>
+          <a:p>
+            <a:r>
+              <a:rPr lang="en-US" dirty="0"/>
+              <a:t>Use</a:t>
             </a:r>
           </a:p>
           <a:p>
             <a:pPr lvl="1"/>
             <a:r>
               <a:rPr lang="en-US" dirty="0"/>
-              <a:t>Uncertain regions</a:t>
+              <a:t>Validation</a:t>
             </a:r>
           </a:p>
           <a:p>
             <a:pPr lvl="1"/>
             <a:r>
               <a:rPr lang="en-US" dirty="0"/>
-              <a:t>Optimum zones</a:t>
-            </a:r>
-          </a:p>
-          <a:p>
+              <a:t>Model selection</a:t>
+            </a:r>
+          </a:p>
+          <a:p>
+            <a:r>
+              <a:rPr lang="en-US" dirty="0"/>
+              <a:t>Improve using</a:t>
+            </a:r>
+          </a:p>
+          <a:p>
+            <a:pPr lvl="1"/>
+            <a:r>
+              <a:rPr lang="en-US" dirty="0"/>
+              <a:t>Bagging</a:t>
+            </a:r>
+          </a:p>
+          <a:p>
+            <a:pPr lvl="1"/>
+            <a:r>
+              <a:rPr lang="en-US"/>
+              <a:t>Boosting</a:t>
+            </a:r>
             <a:endParaRPr lang="en-US" dirty="0"/>
-          </a:p>
-          <a:p>
-            <a:endParaRPr lang="en-US" dirty="0"/>
-          </a:p>
-          <a:p>
-            <a:endParaRPr lang="en-US" dirty="0"/>
-          </a:p>
-          <a:p>
-            <a:pPr marL="0" indent="0">
-              <a:buNone/>
-            </a:pPr>
-            <a:r>
-              <a:rPr lang="en-US" dirty="0">
-                <a:solidFill>
-                  <a:srgbClr val="7030A0"/>
-                </a:solidFill>
-              </a:rPr>
-              <a:t>Model improves progressively</a:t>
-            </a:r>
           </a:p>
         </p:txBody>
       </p:sp>
     </p:spTree>
     <p:extLst>
       <p:ext uri="{BB962C8B-B14F-4D97-AF65-F5344CB8AC3E}">
-        <p14:creationId xmlns:p14="http://schemas.microsoft.com/office/powerpoint/2010/main" val="2205157761"/>
+        <p14:creationId xmlns:p14="http://schemas.microsoft.com/office/powerpoint/2010/main" val="2210710025"/>
       </p:ext>
     </p:extLst>
   </p:cSld>
@@ -4210,56 +4237,79 @@
         <p:spPr/>
         <p:txBody>
           <a:bodyPr>
-            <a:normAutofit fontScale="90000"/>
-          </a:bodyPr>
-          <a:lstStyle/>
-          <a:p>
-            <a:r>
-              <a:rPr lang="en-US" dirty="0"/>
-              <a:t>Surrogate Model – Dataset Enrichment</a:t>
-            </a:r>
-          </a:p>
-        </p:txBody>
-      </p:sp>
-      <p:sp>
-        <p:nvSpPr>
-          <p:cNvPr id="4" name="Content Placeholder 3"/>
-          <p:cNvSpPr>
-            <a:spLocks noGrp="1"/>
-          </p:cNvSpPr>
-          <p:nvPr>
-            <p:ph idx="1"/>
-          </p:nvPr>
-        </p:nvSpPr>
-        <p:spPr/>
-        <p:txBody>
-          <a:bodyPr>
             <a:normAutofit/>
           </a:bodyPr>
           <a:lstStyle/>
           <a:p>
             <a:r>
               <a:rPr lang="en-US" dirty="0"/>
-              <a:t>Add new simulation results</a:t>
-            </a:r>
-          </a:p>
-          <a:p>
-            <a:r>
-              <a:rPr lang="en-US" dirty="0"/>
-              <a:t>Retrain model</a:t>
-            </a:r>
-          </a:p>
-          <a:p>
-            <a:r>
-              <a:rPr lang="en-US" dirty="0"/>
-              <a:t>Repeat until</a:t>
+              <a:t>Surrogate Model – Active Learning</a:t>
+            </a:r>
+          </a:p>
+        </p:txBody>
+      </p:sp>
+      <p:sp>
+        <p:nvSpPr>
+          <p:cNvPr id="4" name="Content Placeholder 3"/>
+          <p:cNvSpPr>
+            <a:spLocks noGrp="1"/>
+          </p:cNvSpPr>
+          <p:nvPr>
+            <p:ph idx="1"/>
+          </p:nvPr>
+        </p:nvSpPr>
+        <p:spPr/>
+        <p:txBody>
+          <a:bodyPr>
+            <a:normAutofit lnSpcReduction="10000"/>
+          </a:bodyPr>
+          <a:lstStyle/>
+          <a:p>
+            <a:r>
+              <a:rPr lang="en-US" dirty="0"/>
+              <a:t>Add new samples iteratively</a:t>
+            </a:r>
+          </a:p>
+          <a:p>
+            <a:r>
+              <a:rPr lang="en-US" dirty="0"/>
+              <a:t>Focus on</a:t>
             </a:r>
           </a:p>
           <a:p>
             <a:pPr lvl="1"/>
             <a:r>
               <a:rPr lang="en-US" dirty="0"/>
-              <a:t>Desired accuracy achieved</a:t>
+              <a:t>Uncertain regions</a:t>
+            </a:r>
+          </a:p>
+          <a:p>
+            <a:pPr lvl="1"/>
+            <a:r>
+              <a:rPr lang="en-US" dirty="0"/>
+              <a:t>Optimum zones</a:t>
+            </a:r>
+          </a:p>
+          <a:p>
+            <a:endParaRPr lang="en-US" dirty="0"/>
+          </a:p>
+          <a:p>
+            <a:endParaRPr lang="en-US" dirty="0"/>
+          </a:p>
+          <a:p>
+            <a:endParaRPr lang="en-US" dirty="0"/>
+          </a:p>
+          <a:p>
+            <a:pPr marL="0" indent="0">
+              <a:buNone/>
+            </a:pPr>
+            <a:r>
+              <a:rPr lang="en-US" dirty="0">
+                <a:solidFill>
+                  <a:srgbClr val="7030A0"/>
+                </a:solidFill>
+              </a:rPr>
+              <a:t>Model improves progressively</a:t>
             </a:r>
           </a:p>
         </p:txBody>
@@ -4267,7 +4317,7 @@
     </p:spTree>
     <p:extLst>
       <p:ext uri="{BB962C8B-B14F-4D97-AF65-F5344CB8AC3E}">
-        <p14:creationId xmlns:p14="http://schemas.microsoft.com/office/powerpoint/2010/main" val="1667022875"/>
+        <p14:creationId xmlns:p14="http://schemas.microsoft.com/office/powerpoint/2010/main" val="2205157761"/>
       </p:ext>
     </p:extLst>
   </p:cSld>
@@ -4307,90 +4357,56 @@
         <p:spPr/>
         <p:txBody>
           <a:bodyPr>
+            <a:normAutofit fontScale="90000"/>
+          </a:bodyPr>
+          <a:lstStyle/>
+          <a:p>
+            <a:r>
+              <a:rPr lang="en-US" dirty="0"/>
+              <a:t>Surrogate Model – Dataset Enrichment</a:t>
+            </a:r>
+          </a:p>
+        </p:txBody>
+      </p:sp>
+      <p:sp>
+        <p:nvSpPr>
+          <p:cNvPr id="4" name="Content Placeholder 3"/>
+          <p:cNvSpPr>
+            <a:spLocks noGrp="1"/>
+          </p:cNvSpPr>
+          <p:nvPr>
+            <p:ph idx="1"/>
+          </p:nvPr>
+        </p:nvSpPr>
+        <p:spPr/>
+        <p:txBody>
+          <a:bodyPr>
             <a:normAutofit/>
           </a:bodyPr>
           <a:lstStyle/>
           <a:p>
             <a:r>
               <a:rPr lang="en-US" dirty="0"/>
-              <a:t>Surrogate Model – Takeaways</a:t>
-            </a:r>
-          </a:p>
-        </p:txBody>
-      </p:sp>
-      <p:sp>
-        <p:nvSpPr>
-          <p:cNvPr id="4" name="Content Placeholder 3"/>
-          <p:cNvSpPr>
-            <a:spLocks noGrp="1"/>
-          </p:cNvSpPr>
-          <p:nvPr>
-            <p:ph idx="1"/>
-          </p:nvPr>
-        </p:nvSpPr>
-        <p:spPr/>
-        <p:txBody>
-          <a:bodyPr>
-            <a:normAutofit fontScale="92500" lnSpcReduction="10000"/>
-          </a:bodyPr>
-          <a:lstStyle/>
-          <a:p>
-            <a:r>
-              <a:rPr lang="en-US" dirty="0"/>
-              <a:t>Simulations are expensive but essential</a:t>
-            </a:r>
-          </a:p>
-          <a:p>
-            <a:r>
-              <a:rPr lang="en-US" dirty="0"/>
-              <a:t>Surrogate models</a:t>
+              <a:t>Add new simulation results</a:t>
+            </a:r>
+          </a:p>
+          <a:p>
+            <a:r>
+              <a:rPr lang="en-US" dirty="0"/>
+              <a:t>Retrain model</a:t>
+            </a:r>
+          </a:p>
+          <a:p>
+            <a:r>
+              <a:rPr lang="en-US" dirty="0"/>
+              <a:t>Repeat until</a:t>
             </a:r>
           </a:p>
           <a:p>
             <a:pPr lvl="1"/>
             <a:r>
               <a:rPr lang="en-US" dirty="0"/>
-              <a:t>Approximate simulations</a:t>
-            </a:r>
-          </a:p>
-          <a:p>
-            <a:pPr lvl="1"/>
-            <a:r>
-              <a:rPr lang="en-US" dirty="0"/>
-              <a:t>Reduce cost drastically</a:t>
-            </a:r>
-          </a:p>
-          <a:p>
-            <a:r>
-              <a:rPr lang="en-US" dirty="0"/>
-              <a:t>Based on</a:t>
-            </a:r>
-          </a:p>
-          <a:p>
-            <a:pPr lvl="1"/>
-            <a:r>
-              <a:rPr lang="en-US" dirty="0"/>
-              <a:t>Machine learning</a:t>
-            </a:r>
-          </a:p>
-          <a:p>
-            <a:pPr lvl="1"/>
-            <a:r>
-              <a:rPr lang="en-US" dirty="0"/>
-              <a:t>Active learning</a:t>
-            </a:r>
-          </a:p>
-          <a:p>
-            <a:r>
-              <a:rPr lang="en-US" dirty="0"/>
-              <a:t>Enable</a:t>
-            </a:r>
-          </a:p>
-          <a:p>
-            <a:pPr lvl="1"/>
-            <a:r>
-              <a:rPr lang="en-US" dirty="0"/>
-              <a:t>Faster design cycles</a:t>
+              <a:t>Desired accuracy achieved</a:t>
             </a:r>
           </a:p>
         </p:txBody>
@@ -4398,7 +4414,7 @@
     </p:spTree>
     <p:extLst>
       <p:ext uri="{BB962C8B-B14F-4D97-AF65-F5344CB8AC3E}">
-        <p14:creationId xmlns:p14="http://schemas.microsoft.com/office/powerpoint/2010/main" val="4042477956"/>
+        <p14:creationId xmlns:p14="http://schemas.microsoft.com/office/powerpoint/2010/main" val="1667022875"/>
       </p:ext>
     </p:extLst>
   </p:cSld>
@@ -4444,7 +4460,7 @@
           <a:p>
             <a:r>
               <a:rPr lang="en-US" dirty="0"/>
-              <a:t>Applications</a:t>
+              <a:t>Surrogate Model – Takeaways</a:t>
             </a:r>
           </a:p>
         </p:txBody>
@@ -4462,37 +4478,66 @@
         <p:spPr/>
         <p:txBody>
           <a:bodyPr>
-            <a:normAutofit/>
+            <a:normAutofit fontScale="92500" lnSpcReduction="10000"/>
           </a:bodyPr>
           <a:lstStyle/>
           <a:p>
             <a:r>
               <a:rPr lang="en-US" dirty="0"/>
-              <a:t>Aerospace design</a:t>
-            </a:r>
-          </a:p>
-          <a:p>
-            <a:r>
-              <a:rPr lang="en-US" dirty="0"/>
-              <a:t>Automotive engineering</a:t>
-            </a:r>
-          </a:p>
-          <a:p>
-            <a:r>
-              <a:rPr lang="en-US" dirty="0"/>
-              <a:t>Product optimization</a:t>
-            </a:r>
-          </a:p>
-          <a:p>
-            <a:r>
-              <a:rPr lang="en-US" dirty="0"/>
-              <a:t>Risk analysis</a:t>
-            </a:r>
-          </a:p>
-          <a:p>
-            <a:r>
-              <a:rPr lang="en-US" dirty="0"/>
-              <a:t>Scientific computing</a:t>
+              <a:t>Simulations are expensive but essential</a:t>
+            </a:r>
+          </a:p>
+          <a:p>
+            <a:r>
+              <a:rPr lang="en-US" dirty="0"/>
+              <a:t>Surrogate models</a:t>
+            </a:r>
+          </a:p>
+          <a:p>
+            <a:pPr lvl="1"/>
+            <a:r>
+              <a:rPr lang="en-US" dirty="0"/>
+              <a:t>Approximate simulations</a:t>
+            </a:r>
+          </a:p>
+          <a:p>
+            <a:pPr lvl="1"/>
+            <a:r>
+              <a:rPr lang="en-US" dirty="0"/>
+              <a:t>Reduce cost drastically</a:t>
+            </a:r>
+          </a:p>
+          <a:p>
+            <a:r>
+              <a:rPr lang="en-US" dirty="0"/>
+              <a:t>Based on</a:t>
+            </a:r>
+          </a:p>
+          <a:p>
+            <a:pPr lvl="1"/>
+            <a:r>
+              <a:rPr lang="en-US" dirty="0"/>
+              <a:t>Machine learning</a:t>
+            </a:r>
+          </a:p>
+          <a:p>
+            <a:pPr lvl="1"/>
+            <a:r>
+              <a:rPr lang="en-US" dirty="0"/>
+              <a:t>Active learning</a:t>
+            </a:r>
+          </a:p>
+          <a:p>
+            <a:r>
+              <a:rPr lang="en-US" dirty="0"/>
+              <a:t>Enable</a:t>
+            </a:r>
+          </a:p>
+          <a:p>
+            <a:pPr lvl="1"/>
+            <a:r>
+              <a:rPr lang="en-US" dirty="0"/>
+              <a:t>Faster design cycles</a:t>
             </a:r>
           </a:p>
         </p:txBody>
@@ -4500,7 +4545,7 @@
     </p:spTree>
     <p:extLst>
       <p:ext uri="{BB962C8B-B14F-4D97-AF65-F5344CB8AC3E}">
-        <p14:creationId xmlns:p14="http://schemas.microsoft.com/office/powerpoint/2010/main" val="2285691702"/>
+        <p14:creationId xmlns:p14="http://schemas.microsoft.com/office/powerpoint/2010/main" val="4042477956"/>
       </p:ext>
     </p:extLst>
   </p:cSld>
@@ -4546,7 +4591,7 @@
           <a:p>
             <a:r>
               <a:rPr lang="en-US" dirty="0"/>
-              <a:t>Conclusions</a:t>
+              <a:t>Applications</a:t>
             </a:r>
           </a:p>
         </p:txBody>
@@ -4570,34 +4615,31 @@
           <a:p>
             <a:r>
               <a:rPr lang="en-US" dirty="0"/>
-              <a:t>Surrogate modeling bridges</a:t>
-            </a:r>
-          </a:p>
-          <a:p>
-            <a:pPr lvl="1"/>
-            <a:r>
-              <a:rPr lang="en-US" dirty="0"/>
-              <a:t>Simulation and Machine Learning</a:t>
-            </a:r>
-          </a:p>
-          <a:p>
-            <a:r>
-              <a:rPr lang="en-US" dirty="0"/>
-              <a:t>Critical for</a:t>
-            </a:r>
-          </a:p>
-          <a:p>
-            <a:pPr lvl="1"/>
-            <a:r>
-              <a:rPr lang="en-US" dirty="0"/>
-              <a:t>Modern engineering design</a:t>
-            </a:r>
-          </a:p>
-          <a:p>
-            <a:pPr lvl="1"/>
-            <a:r>
-              <a:rPr lang="en-US" dirty="0"/>
-              <a:t>High performance computing problems</a:t>
+              <a:t>Aerospace design</a:t>
+            </a:r>
+          </a:p>
+          <a:p>
+            <a:r>
+              <a:rPr lang="en-US" dirty="0"/>
+              <a:t>Automotive engineering</a:t>
+            </a:r>
+          </a:p>
+          <a:p>
+            <a:r>
+              <a:rPr lang="en-US" dirty="0"/>
+              <a:t>Product optimization</a:t>
+            </a:r>
+          </a:p>
+          <a:p>
+            <a:r>
+              <a:rPr lang="en-US" dirty="0"/>
+              <a:t>Risk analysis</a:t>
+            </a:r>
+          </a:p>
+          <a:p>
+            <a:r>
+              <a:rPr lang="en-US" dirty="0"/>
+              <a:t>Scientific computing</a:t>
             </a:r>
           </a:p>
         </p:txBody>
@@ -4605,7 +4647,7 @@
     </p:spTree>
     <p:extLst>
       <p:ext uri="{BB962C8B-B14F-4D97-AF65-F5344CB8AC3E}">
-        <p14:creationId xmlns:p14="http://schemas.microsoft.com/office/powerpoint/2010/main" val="1922653856"/>
+        <p14:creationId xmlns:p14="http://schemas.microsoft.com/office/powerpoint/2010/main" val="2285691702"/>
       </p:ext>
     </p:extLst>
   </p:cSld>
@@ -4729,6 +4771,129 @@
 </file>
 
 <file path=ppt/slides/slide20.xml><?xml version="1.0" encoding="utf-8"?>
+<p:sld xmlns:a="http://schemas.openxmlformats.org/drawingml/2006/main" xmlns:r="http://schemas.openxmlformats.org/officeDocument/2006/relationships" xmlns:p="http://schemas.openxmlformats.org/presentationml/2006/main">
+  <p:cSld>
+    <p:spTree>
+      <p:nvGrpSpPr>
+        <p:cNvPr id="1" name=""/>
+        <p:cNvGrpSpPr/>
+        <p:nvPr/>
+      </p:nvGrpSpPr>
+      <p:grpSpPr>
+        <a:xfrm>
+          <a:off x="0" y="0"/>
+          <a:ext cx="0" cy="0"/>
+          <a:chOff x="0" y="0"/>
+          <a:chExt cx="0" cy="0"/>
+        </a:xfrm>
+      </p:grpSpPr>
+      <p:sp>
+        <p:nvSpPr>
+          <p:cNvPr id="2" name="Title 1"/>
+          <p:cNvSpPr>
+            <a:spLocks noGrp="1"/>
+          </p:cNvSpPr>
+          <p:nvPr>
+            <p:ph type="title"/>
+          </p:nvPr>
+        </p:nvSpPr>
+        <p:spPr/>
+        <p:txBody>
+          <a:bodyPr>
+            <a:normAutofit/>
+          </a:bodyPr>
+          <a:lstStyle/>
+          <a:p>
+            <a:r>
+              <a:rPr lang="en-US" dirty="0"/>
+              <a:t>Conclusions</a:t>
+            </a:r>
+          </a:p>
+        </p:txBody>
+      </p:sp>
+      <p:sp>
+        <p:nvSpPr>
+          <p:cNvPr id="4" name="Content Placeholder 3"/>
+          <p:cNvSpPr>
+            <a:spLocks noGrp="1"/>
+          </p:cNvSpPr>
+          <p:nvPr>
+            <p:ph idx="1"/>
+          </p:nvPr>
+        </p:nvSpPr>
+        <p:spPr/>
+        <p:txBody>
+          <a:bodyPr>
+            <a:normAutofit/>
+          </a:bodyPr>
+          <a:lstStyle/>
+          <a:p>
+            <a:r>
+              <a:rPr lang="en-US" dirty="0"/>
+              <a:t>Surrogate model bridges</a:t>
+            </a:r>
+          </a:p>
+          <a:p>
+            <a:pPr lvl="1"/>
+            <a:r>
+              <a:rPr lang="en-US" dirty="0"/>
+              <a:t>Simulation and Machine Learning</a:t>
+            </a:r>
+          </a:p>
+          <a:p>
+            <a:r>
+              <a:rPr lang="en-US" dirty="0"/>
+              <a:t>Critical for</a:t>
+            </a:r>
+          </a:p>
+          <a:p>
+            <a:pPr lvl="1"/>
+            <a:r>
+              <a:rPr lang="en-US" dirty="0"/>
+              <a:t>Modern engineering design</a:t>
+            </a:r>
+          </a:p>
+          <a:p>
+            <a:pPr lvl="1"/>
+            <a:r>
+              <a:rPr lang="en-US" dirty="0"/>
+              <a:t>High performance computing problems</a:t>
+            </a:r>
+          </a:p>
+          <a:p>
+            <a:r>
+              <a:rPr lang="en-US" dirty="0"/>
+              <a:t>Surrogate model – Speed and Scalability</a:t>
+            </a:r>
+          </a:p>
+          <a:p>
+            <a:r>
+              <a:rPr lang="en-US" dirty="0"/>
+              <a:t>Enable real time decision making</a:t>
+            </a:r>
+          </a:p>
+          <a:p>
+            <a:r>
+              <a:rPr lang="en-US" dirty="0"/>
+              <a:t>Essential for modern AI-driven engineering</a:t>
+            </a:r>
+          </a:p>
+        </p:txBody>
+      </p:sp>
+    </p:spTree>
+    <p:extLst>
+      <p:ext uri="{BB962C8B-B14F-4D97-AF65-F5344CB8AC3E}">
+        <p14:creationId xmlns:p14="http://schemas.microsoft.com/office/powerpoint/2010/main" val="1922653856"/>
+      </p:ext>
+    </p:extLst>
+  </p:cSld>
+  <p:clrMapOvr>
+    <a:masterClrMapping/>
+  </p:clrMapOvr>
+</p:sld>
+</file>
+
+<file path=ppt/slides/slide21.xml><?xml version="1.0" encoding="utf-8"?>
 <p:sld xmlns:a="http://schemas.openxmlformats.org/drawingml/2006/main" xmlns:r="http://schemas.openxmlformats.org/officeDocument/2006/relationships" xmlns:p="http://schemas.openxmlformats.org/presentationml/2006/main">
   <p:cSld>
     <p:spTree>
